--- a/doc-mk/Requirements/QA1-revised.pptx
+++ b/doc-mk/Requirements/QA1-revised.pptx
@@ -5960,7 +5960,7 @@
                       </a:r>
                       <a:r>
                         <a:rPr lang="en-US" altLang="ko-KR" sz="1000" b="1" dirty="0"/>
-                        <a:t>[측정: 변경 시나리오별 변경 모듈 ≤ 6개 (설계 component 12~14개의 절반 이하), 3종 중 최악값 기준]</a:t>
+                        <a:t>[측정: 변경 시나리오별 변경 모듈 ≤ 6개 (OSS commit의 80%가 6 file 이하), 3종 중 최악값 기준]</a:t>
                       </a:r>
                       <a:endParaRPr lang="ko-KR" altLang="en-US" sz="1000" dirty="0"/>
                     </a:p>
@@ -13417,327 +13417,7 @@
                 <a:latin typeface="맑은 고딕"/>
                 <a:ea typeface="맑은 고딕"/>
               </a:rPr>
-              <a:t>출처</a:t>
-            </a:r>
-            <a:r>
-              <a:rPr sz="750" b="0" dirty="0">
-                <a:solidFill>
-                  <a:srgbClr val="404040"/>
-                </a:solidFill>
-                <a:latin typeface="맑은 고딕"/>
-                <a:ea typeface="맑은 고딕"/>
-              </a:rPr>
-              <a:t>: </a:t>
-            </a:r>
-            <a:r>
-              <a:rPr lang="en-US" sz="750" b="0" dirty="0">
-                <a:solidFill>
-                  <a:srgbClr val="404040"/>
-                </a:solidFill>
-                <a:latin typeface="맑은 고딕"/>
-                <a:ea typeface="맑은 고딕"/>
-              </a:rPr>
-              <a:t>[1] </a:t>
-            </a:r>
-            <a:r>
-              <a:rPr sz="750" b="0" dirty="0">
-                <a:solidFill>
-                  <a:srgbClr val="404040"/>
-                </a:solidFill>
-                <a:latin typeface="맑은 고딕"/>
-                <a:ea typeface="맑은 고딕"/>
-              </a:rPr>
-              <a:t>SWE-bench (</a:t>
-            </a:r>
-            <a:r>
-              <a:rPr sz="750" b="0" dirty="0" err="1">
-                <a:solidFill>
-                  <a:srgbClr val="404040"/>
-                </a:solidFill>
-                <a:latin typeface="맑은 고딕"/>
-                <a:ea typeface="맑은 고딕"/>
-              </a:rPr>
-              <a:t>arXiv</a:t>
-            </a:r>
-            <a:r>
-              <a:rPr sz="750" b="0" dirty="0">
-                <a:solidFill>
-                  <a:srgbClr val="404040"/>
-                </a:solidFill>
-                <a:latin typeface="맑은 고딕"/>
-                <a:ea typeface="맑은 고딕"/>
-              </a:rPr>
-              <a:t> 2310.06770)</a:t>
-            </a:r>
-            <a:r>
-              <a:rPr lang="en-US" sz="750" b="0" dirty="0">
-                <a:solidFill>
-                  <a:srgbClr val="404040"/>
-                </a:solidFill>
-                <a:latin typeface="맑은 고딕"/>
-                <a:ea typeface="맑은 고딕"/>
-              </a:rPr>
-              <a:t>, </a:t>
-            </a:r>
-            <a:r>
-              <a:rPr lang="en-US" sz="750" dirty="0">
-                <a:solidFill>
-                  <a:srgbClr val="404040"/>
-                </a:solidFill>
-                <a:latin typeface="맑은 고딕"/>
-                <a:ea typeface="맑은 고딕"/>
-              </a:rPr>
-              <a:t>[2] </a:t>
-            </a:r>
-            <a:r>
-              <a:rPr sz="750" b="0" dirty="0" err="1">
-                <a:solidFill>
-                  <a:srgbClr val="404040"/>
-                </a:solidFill>
-                <a:latin typeface="맑은 고딕"/>
-                <a:ea typeface="맑은 고딕"/>
-              </a:rPr>
-              <a:t>vLLM</a:t>
-            </a:r>
-            <a:r>
-              <a:rPr sz="750" b="0" dirty="0">
-                <a:solidFill>
-                  <a:srgbClr val="404040"/>
-                </a:solidFill>
-                <a:latin typeface="맑은 고딕"/>
-                <a:ea typeface="맑은 고딕"/>
-              </a:rPr>
-              <a:t> </a:t>
-            </a:r>
-            <a:r>
-              <a:rPr sz="750" b="0" dirty="0" err="1">
-                <a:solidFill>
-                  <a:srgbClr val="404040"/>
-                </a:solidFill>
-                <a:latin typeface="맑은 고딕"/>
-                <a:ea typeface="맑은 고딕"/>
-              </a:rPr>
-              <a:t>저장소</a:t>
-            </a:r>
-            <a:r>
-              <a:rPr sz="750" b="0" dirty="0">
-                <a:solidFill>
-                  <a:srgbClr val="404040"/>
-                </a:solidFill>
-                <a:latin typeface="맑은 고딕"/>
-                <a:ea typeface="맑은 고딕"/>
-              </a:rPr>
-              <a:t> </a:t>
-            </a:r>
-            <a:r>
-              <a:rPr sz="750" b="0" dirty="0" err="1">
-                <a:solidFill>
-                  <a:srgbClr val="404040"/>
-                </a:solidFill>
-                <a:latin typeface="맑은 고딕"/>
-                <a:ea typeface="맑은 고딕"/>
-              </a:rPr>
-              <a:t>kv_connector</a:t>
-            </a:r>
-            <a:r>
-              <a:rPr sz="750" b="0" dirty="0">
-                <a:solidFill>
-                  <a:srgbClr val="404040"/>
-                </a:solidFill>
-                <a:latin typeface="맑은 고딕"/>
-                <a:ea typeface="맑은 고딕"/>
-              </a:rPr>
-              <a:t>/v1 </a:t>
-            </a:r>
-            <a:r>
-              <a:rPr sz="750" b="0" dirty="0" err="1">
-                <a:solidFill>
-                  <a:srgbClr val="404040"/>
-                </a:solidFill>
-                <a:latin typeface="맑은 고딕"/>
-                <a:ea typeface="맑은 고딕"/>
-              </a:rPr>
-              <a:t>직접</a:t>
-            </a:r>
-            <a:r>
-              <a:rPr sz="750" b="0" dirty="0">
-                <a:solidFill>
-                  <a:srgbClr val="404040"/>
-                </a:solidFill>
-                <a:latin typeface="맑은 고딕"/>
-                <a:ea typeface="맑은 고딕"/>
-              </a:rPr>
-              <a:t> </a:t>
-            </a:r>
-            <a:r>
-              <a:rPr sz="750" b="0" dirty="0" err="1">
-                <a:solidFill>
-                  <a:srgbClr val="404040"/>
-                </a:solidFill>
-                <a:latin typeface="맑은 고딕"/>
-                <a:ea typeface="맑은 고딕"/>
-              </a:rPr>
-              <a:t>계수</a:t>
-            </a:r>
-            <a:r>
-              <a:rPr sz="750" b="0" dirty="0">
-                <a:solidFill>
-                  <a:srgbClr val="404040"/>
-                </a:solidFill>
-                <a:latin typeface="맑은 고딕"/>
-                <a:ea typeface="맑은 고딕"/>
-              </a:rPr>
-              <a:t>(</a:t>
-            </a:r>
-            <a:r>
-              <a:rPr sz="750" b="0" dirty="0" err="1">
-                <a:solidFill>
-                  <a:srgbClr val="404040"/>
-                </a:solidFill>
-                <a:latin typeface="맑은 고딕"/>
-                <a:ea typeface="맑은 고딕"/>
-              </a:rPr>
-              <a:t>최상위</a:t>
-            </a:r>
-            <a:r>
-              <a:rPr sz="750" b="0" dirty="0">
-                <a:solidFill>
-                  <a:srgbClr val="404040"/>
-                </a:solidFill>
-                <a:latin typeface="맑은 고딕"/>
-                <a:ea typeface="맑은 고딕"/>
-              </a:rPr>
-              <a:t> </a:t>
-            </a:r>
-            <a:r>
-              <a:rPr sz="750" b="0" dirty="0" err="1">
-                <a:solidFill>
-                  <a:srgbClr val="404040"/>
-                </a:solidFill>
-                <a:latin typeface="맑은 고딕"/>
-                <a:ea typeface="맑은 고딕"/>
-              </a:rPr>
-              <a:t>파일</a:t>
-            </a:r>
-            <a:r>
-              <a:rPr sz="750" b="0" dirty="0">
-                <a:solidFill>
-                  <a:srgbClr val="404040"/>
-                </a:solidFill>
-                <a:latin typeface="맑은 고딕"/>
-                <a:ea typeface="맑은 고딕"/>
-              </a:rPr>
-              <a:t> 192~1,190 LOC, </a:t>
-            </a:r>
-            <a:r>
-              <a:rPr sz="750" b="0" dirty="0" err="1">
-                <a:solidFill>
-                  <a:srgbClr val="404040"/>
-                </a:solidFill>
-                <a:latin typeface="맑은 고딕"/>
-                <a:ea typeface="맑은 고딕"/>
-              </a:rPr>
-              <a:t>중앙값</a:t>
-            </a:r>
-            <a:r>
-              <a:rPr sz="750" b="0" dirty="0">
-                <a:solidFill>
-                  <a:srgbClr val="404040"/>
-                </a:solidFill>
-                <a:latin typeface="맑은 고딕"/>
-                <a:ea typeface="맑은 고딕"/>
-              </a:rPr>
-              <a:t> 356)</a:t>
-            </a:r>
-            <a:r>
-              <a:rPr lang="en-US" sz="750" b="0" dirty="0">
-                <a:solidFill>
-                  <a:srgbClr val="404040"/>
-                </a:solidFill>
-                <a:latin typeface="맑은 고딕"/>
-                <a:ea typeface="맑은 고딕"/>
-              </a:rPr>
-              <a:t>, </a:t>
-            </a:r>
-            <a:r>
-              <a:rPr lang="en-US" sz="750" dirty="0">
-                <a:solidFill>
-                  <a:srgbClr val="404040"/>
-                </a:solidFill>
-                <a:latin typeface="맑은 고딕"/>
-                <a:ea typeface="맑은 고딕"/>
-              </a:rPr>
-              <a:t>[3] </a:t>
-            </a:r>
-            <a:r>
-              <a:rPr lang="en-US" sz="750" b="0" dirty="0">
-                <a:solidFill>
-                  <a:srgbClr val="404040"/>
-                </a:solidFill>
-                <a:latin typeface="맑은 고딕"/>
-                <a:ea typeface="맑은 고딕"/>
-              </a:rPr>
-              <a:t>Brooks, The Mythical Man-Month </a:t>
-            </a:r>
-            <a:r>
-              <a:rPr lang="ko-KR" altLang="en-US" sz="750" b="0" dirty="0">
-                <a:solidFill>
-                  <a:srgbClr val="404040"/>
-                </a:solidFill>
-                <a:latin typeface="맑은 고딕"/>
-                <a:ea typeface="맑은 고딕"/>
-              </a:rPr>
-              <a:t>계열의 </a:t>
-            </a:r>
-            <a:r>
-              <a:rPr lang="en-US" altLang="ko-KR" sz="750" b="0" dirty="0">
-                <a:solidFill>
-                  <a:srgbClr val="404040"/>
-                </a:solidFill>
-                <a:latin typeface="맑은 고딕"/>
-                <a:ea typeface="맑은 고딕"/>
-              </a:rPr>
-              <a:t>"</a:t>
-            </a:r>
-            <a:r>
-              <a:rPr lang="ko-KR" altLang="en-US" sz="750" b="0" dirty="0">
-                <a:solidFill>
-                  <a:srgbClr val="404040"/>
-                </a:solidFill>
-                <a:latin typeface="맑은 고딕"/>
-                <a:ea typeface="맑은 고딕"/>
-              </a:rPr>
-              <a:t>하루 약 </a:t>
-            </a:r>
-            <a:r>
-              <a:rPr lang="en-US" altLang="ko-KR" sz="750" b="0" dirty="0">
-                <a:solidFill>
-                  <a:srgbClr val="404040"/>
-                </a:solidFill>
-                <a:latin typeface="맑은 고딕"/>
-                <a:ea typeface="맑은 고딕"/>
-              </a:rPr>
-              <a:t>10 </a:t>
-            </a:r>
-            <a:r>
-              <a:rPr lang="en-US" sz="750" b="0" dirty="0">
-                <a:solidFill>
-                  <a:srgbClr val="404040"/>
-                </a:solidFill>
-                <a:latin typeface="맑은 고딕"/>
-                <a:ea typeface="맑은 고딕"/>
-              </a:rPr>
-              <a:t>LOC“, </a:t>
-            </a:r>
-            <a:r>
-              <a:rPr lang="sv-SE" sz="750" b="0" dirty="0">
-                <a:solidFill>
-                  <a:srgbClr val="404040"/>
-                </a:solidFill>
-                <a:latin typeface="맑은 고딕"/>
-                <a:ea typeface="맑은 고딕"/>
-              </a:rPr>
-              <a:t>Poul-Henning Kamp (Varnish), “Going fast slowly”</a:t>
+              <a:t>출처: [1] SWE-bench (arXiv 2310.06770), [2] vLLM 저장소 kv_connector/v1 직접 계수(최상위 파일 192~1,190 LOC, 중앙값 356), [3] Brooks, The Mythical Man-Month 계열의 "하루 약 10 LOC“, Poul-Henning Kamp (Varnish), “Going fast slowly” [4] Ferreira et al., Characterizing Commits in Open-Source Software, SBQS 2022 (Java 24개 프로젝트, 1M commits). file 수는 module 수의 상한 근사(module ≥ 1 file)</a:t>
             </a:r>
             <a:endParaRPr sz="750" b="0" dirty="0">
               <a:solidFill>
@@ -14691,7 +14371,7 @@
                           <a:latin typeface="맑은 고딕"/>
                           <a:ea typeface="맑은 고딕"/>
                         </a:rPr>
-                        <a:t>일상 변경 규모: </a:t>
+                        <a:t>일상 변경 규모(중앙값): OSS Java 24개 프로젝트 files/commit 중앙값 1~3 (다수 2)</a:t>
                       </a:r>
                       <a:endParaRPr lang="en-US" sz="900" b="1" dirty="0">
                         <a:solidFill>
@@ -14763,27 +14443,7 @@
                           <a:latin typeface="맑은 고딕"/>
                           <a:ea typeface="맑은 고딕"/>
                         </a:rPr>
-                        <a:t>SWE-bench (</a:t>
-                      </a:r>
-                      <a:r>
-                        <a:rPr sz="900" b="0" dirty="0" err="1">
-                          <a:solidFill>
-                            <a:srgbClr val="000000"/>
-                          </a:solidFill>
-                          <a:latin typeface="맑은 고딕"/>
-                          <a:ea typeface="맑은 고딕"/>
-                        </a:rPr>
-                        <a:t>arXiv</a:t>
-                      </a:r>
-                      <a:r>
-                        <a:rPr sz="900" b="0" dirty="0">
-                          <a:solidFill>
-                            <a:srgbClr val="000000"/>
-                          </a:solidFill>
-                          <a:latin typeface="맑은 고딕"/>
-                          <a:ea typeface="맑은 고딕"/>
-                        </a:rPr>
-                        <a:t> 2310.06770), </a:t>
+                        <a:t>Ferreira et al. [4],</a:t>
                       </a:r>
                       <a:endParaRPr lang="en-US" sz="900" b="0" dirty="0">
                         <a:solidFill>
@@ -14807,47 +14467,7 @@
                           <a:latin typeface="맑은 고딕"/>
                           <a:ea typeface="맑은 고딕"/>
                         </a:rPr>
-                        <a:t>사전</a:t>
-                      </a:r>
-                      <a:r>
-                        <a:rPr sz="900" b="0" dirty="0">
-                          <a:solidFill>
-                            <a:srgbClr val="000000"/>
-                          </a:solidFill>
-                          <a:latin typeface="맑은 고딕"/>
-                          <a:ea typeface="맑은 고딕"/>
-                        </a:rPr>
-                        <a:t> </a:t>
-                      </a:r>
-                      <a:r>
-                        <a:rPr sz="900" b="0" dirty="0" err="1">
-                          <a:solidFill>
-                            <a:srgbClr val="000000"/>
-                          </a:solidFill>
-                          <a:latin typeface="맑은 고딕"/>
-                          <a:ea typeface="맑은 고딕"/>
-                        </a:rPr>
-                        <a:t>등록</a:t>
-                      </a:r>
-                      <a:r>
-                        <a:rPr sz="900" b="0" dirty="0">
-                          <a:solidFill>
-                            <a:srgbClr val="000000"/>
-                          </a:solidFill>
-                          <a:latin typeface="맑은 고딕"/>
-                          <a:ea typeface="맑은 고딕"/>
-                        </a:rPr>
-                        <a:t> </a:t>
-                      </a:r>
-                      <a:r>
-                        <a:rPr sz="900" b="0" dirty="0" err="1">
-                          <a:solidFill>
-                            <a:srgbClr val="000000"/>
-                          </a:solidFill>
-                          <a:latin typeface="맑은 고딕"/>
-                          <a:ea typeface="맑은 고딕"/>
-                        </a:rPr>
-                        <a:t>가정</a:t>
+                        <a:t>SWE-bench (arXiv 2310.06770)</a:t>
                       </a:r>
                       <a:endParaRPr sz="900" b="0" dirty="0">
                         <a:solidFill>
@@ -15277,7 +14897,7 @@
                       </a:pPr>
                       <a:r>
                         <a:rPr lang="ko-KR" altLang="en-US" sz="900" b="1" dirty="0"/>
-                        <a:t>변경이 한 Plane 안에서 끝남: component 12~14개 ÷ 3 Plane(Decision·Control·Data) ≈ 4개</a:t>
+                        <a:t>★1과 ★3의 산술 중점 (기존 별 규칙: ★★ = ★과 ★★★의 중점)</a:t>
                       </a:r>
                       <a:endParaRPr sz="900" b="1" dirty="0">
                         <a:solidFill>
@@ -15519,7 +15139,7 @@
                           <a:latin typeface="맑은 고딕"/>
                           <a:ea typeface="맑은 고딕"/>
                         </a:rPr>
-                        <a:t>★1과 ★2의 중점 (정수 module 수 기준)</a:t>
+                        <a:t>★1과 ★2의 중점. 참고: commit의 75%가 5 file 이하 (24개 프로젝트 Q3의 중앙값)</a:t>
                       </a:r>
                       <a:endParaRPr sz="900" b="0" dirty="0">
                         <a:solidFill>
@@ -15574,7 +15194,7 @@
                           <a:latin typeface="맑은 고딕"/>
                           <a:ea typeface="맑은 고딕"/>
                         </a:rPr>
-                        <a:t>—</a:t>
+                        <a:t>Ferreira et al. [4]</a:t>
                       </a:r>
                     </a:p>
                   </a:txBody>
@@ -15755,7 +15375,7 @@
                       </a:pPr>
                       <a:r>
                         <a:rPr lang="ko-KR" altLang="en-US" sz="900" b="1" dirty="0"/>
-                        <a:t>최소 충족선: 한 번의 변경이 설계 component의 절반 이하에 국한된다.</a:t>
+                        <a:t>최소 충족선: 일상 변경의 80%가 이 규모 이하.</a:t>
                       </a:r>
                     </a:p>
                     <a:p>
@@ -15766,7 +15386,7 @@
                       </a:pPr>
                       <a:r>
                         <a:rPr lang="ko-KR" altLang="en-US" sz="900" b="1" dirty="0"/>
-                        <a:t>component 12~14개의 1/2 ≈ 6개 (과반을 건드리지 않음).</a:t>
+                        <a:t>OSS Java 24개 프로젝트 files/commit 80th percentile의 중앙값 6 (범위 2~15).</a:t>
                       </a:r>
                     </a:p>
                   </a:txBody>
@@ -15814,7 +15434,7 @@
                           <a:latin typeface="맑은 고딕"/>
                           <a:ea typeface="맑은 고딕"/>
                         </a:rPr>
-                        <a:t>DP1 사전 등록 component 목록,</a:t>
+                        <a:t>Ferreira et al. [4]</a:t>
                       </a:r>
                       <a:endParaRPr lang="en-US" sz="900" b="0" dirty="0">
                         <a:solidFill>
@@ -15838,7 +15458,7 @@
                           <a:latin typeface="맑은 고딕"/>
                           <a:ea typeface="맑은 고딕"/>
                         </a:rPr>
-                        <a:t>3-Plane 구성(Decision·Control·Data)</a:t>
+                        <a:t>(SBQS 2022, Table 4)</a:t>
                       </a:r>
                       <a:endParaRPr sz="900" b="0" dirty="0">
                         <a:solidFill>
@@ -16038,7 +15658,7 @@
                       </a:pPr>
                       <a:r>
                         <a:rPr lang="en-US" altLang="ko-KR" sz="900" dirty="0"/>
-                        <a:t>7개 이상이면 한 번의 변경이 설계의 과반으로 퍼져 확장 지점이 없는 구조로 판단.</a:t>
+                        <a:t>7개 이상이면 일상 변경 상위 20%에 해당하는 큰 변경 규모: 확장 지점이 없는 구조로 판단.</a:t>
                       </a:r>
                       <a:endParaRPr sz="900" b="0" dirty="0">
                         <a:solidFill>
@@ -18542,7 +18162,7 @@
         <p:spPr>
           <a:xfrm>
             <a:off x="5344016" y="5835777"/>
-            <a:ext cx="3080000" cy="182880"/>
+            <a:ext cx="2500000" cy="182880"/>
           </a:xfrm>
           <a:prstGeom prst="rect">
             <a:avLst/>
@@ -18568,7 +18188,7 @@
                 <a:latin typeface="맑은 고딕"/>
                 <a:ea typeface="맑은 고딕"/>
               </a:rPr>
-              <a:t>★2 경계 4 module ≈ 0.8 MM · component 12~14개 ÷ 3 Plane ≈ 4개</a:t>
+              <a:t>★2 경계 4 module ≈ 0.8 MM · ★1과 ★3의 중점</a:t>
             </a:r>
           </a:p>
         </p:txBody>
@@ -18639,7 +18259,7 @@
         <p:spPr>
           <a:xfrm>
             <a:off x="2104428" y="6018657"/>
-            <a:ext cx="3429000" cy="182880"/>
+            <a:ext cx="3600000" cy="182880"/>
           </a:xfrm>
           <a:prstGeom prst="rect">
             <a:avLst/>
@@ -18665,7 +18285,7 @@
                 <a:latin typeface="맑은 고딕"/>
                 <a:ea typeface="맑은 고딕"/>
               </a:rPr>
-              <a:t>★1 경계 6 module ≈ 1.2 MM · component 12~14개의 1/2</a:t>
+              <a:t>★1 경계 6 module ≈ 1.2 MM · 일상 변경의 80% (OSS commit 80th %ile 중앙값)</a:t>
             </a:r>
           </a:p>
         </p:txBody>

--- a/doc-mk/Requirements/QA1-revised.pptx
+++ b/doc-mk/Requirements/QA1-revised.pptx
@@ -5956,11 +5956,11 @@
                       </a:br>
                       <a:r>
                         <a:rPr lang="ko-KR" altLang="en-US" sz="1000" dirty="0"/>
-                        <a:t>새로운 메모리 tier 추가, 이동·배치 정책 교체, Upstream(vLLM) 변경은 각각 단독으로 발생할 수 있다. 어느 경우든 서빙 경로에 미치는 변경 범위를 최소화하여 반영할 수 있어야 한다. </a:t>
+                        <a:t>새로운 메모리 tier 추가, 이동·배치 정책 교체, Upstream(vLLM) 변경, 새 event·telemetry 신호 추가는 각각 단독으로 발생할 수 있다. 어느 경우든 서빙 경로에 미치는 변경 범위를 최소화하여 반영할 수 있어야 한다. </a:t>
                       </a:r>
                       <a:r>
                         <a:rPr lang="en-US" altLang="ko-KR" sz="1000" b="1" dirty="0"/>
-                        <a:t>[측정: 변경 시나리오별 변경 모듈 ≤ 6개 (OSS commit의 80%가 6 file 이하), 3종 중 최악값 기준]</a:t>
+                        <a:t>[측정: 변경 시나리오별 변경 모듈 ≤ 6개 (OSS commit의 80%가 6 file 이하), 4종 중 최악값 기준]</a:t>
                       </a:r>
                       <a:endParaRPr lang="ko-KR" altLang="en-US" sz="1000" dirty="0"/>
                     </a:p>
@@ -13473,367 +13473,17 @@
                 <a:latin typeface="맑은 고딕"/>
                 <a:ea typeface="맑은 고딕"/>
               </a:rPr>
-              <a:t>[</a:t>
-            </a:r>
-            <a:r>
-              <a:rPr sz="1000" b="1" dirty="0" err="1">
-                <a:solidFill>
-                  <a:srgbClr val="2F5597"/>
-                </a:solidFill>
-                <a:latin typeface="맑은 고딕"/>
-                <a:ea typeface="맑은 고딕"/>
-              </a:rPr>
-              <a:t>변경</a:t>
-            </a:r>
-            <a:r>
-              <a:rPr sz="1000" b="1" dirty="0">
-                <a:solidFill>
-                  <a:srgbClr val="2F5597"/>
-                </a:solidFill>
-                <a:latin typeface="맑은 고딕"/>
-                <a:ea typeface="맑은 고딕"/>
-              </a:rPr>
-              <a:t> </a:t>
-            </a:r>
-            <a:r>
-              <a:rPr sz="1000" b="1" dirty="0" err="1">
-                <a:solidFill>
-                  <a:srgbClr val="2F5597"/>
-                </a:solidFill>
-                <a:latin typeface="맑은 고딕"/>
-                <a:ea typeface="맑은 고딕"/>
-              </a:rPr>
-              <a:t>시나리오</a:t>
-            </a:r>
-            <a:r>
-              <a:rPr sz="1000" b="1" dirty="0">
-                <a:solidFill>
-                  <a:srgbClr val="2F5597"/>
-                </a:solidFill>
-                <a:latin typeface="맑은 고딕"/>
-                <a:ea typeface="맑은 고딕"/>
-              </a:rPr>
-              <a:t> 3종, KV </a:t>
-            </a:r>
-            <a:r>
-              <a:rPr sz="1000" b="1" dirty="0" err="1">
-                <a:solidFill>
-                  <a:srgbClr val="2F5597"/>
-                </a:solidFill>
-                <a:latin typeface="맑은 고딕"/>
-                <a:ea typeface="맑은 고딕"/>
-              </a:rPr>
-              <a:t>캐시</a:t>
-            </a:r>
-            <a:r>
-              <a:rPr sz="1000" b="1" dirty="0">
-                <a:solidFill>
-                  <a:srgbClr val="2F5597"/>
-                </a:solidFill>
-                <a:latin typeface="맑은 고딕"/>
-                <a:ea typeface="맑은 고딕"/>
-              </a:rPr>
-              <a:t> </a:t>
-            </a:r>
-            <a:r>
-              <a:rPr sz="1000" b="1" dirty="0" err="1">
-                <a:solidFill>
-                  <a:srgbClr val="2F5597"/>
-                </a:solidFill>
-                <a:latin typeface="맑은 고딕"/>
-                <a:ea typeface="맑은 고딕"/>
-              </a:rPr>
-              <a:t>관리</a:t>
-            </a:r>
-            <a:r>
-              <a:rPr sz="1000" b="1" dirty="0">
-                <a:solidFill>
-                  <a:srgbClr val="2F5597"/>
-                </a:solidFill>
-                <a:latin typeface="맑은 고딕"/>
-                <a:ea typeface="맑은 고딕"/>
-              </a:rPr>
-              <a:t> </a:t>
-            </a:r>
-            <a:r>
-              <a:rPr sz="1000" b="1" dirty="0" err="1">
-                <a:solidFill>
-                  <a:srgbClr val="2F5597"/>
-                </a:solidFill>
-                <a:latin typeface="맑은 고딕"/>
-                <a:ea typeface="맑은 고딕"/>
-              </a:rPr>
-              <a:t>범위</a:t>
-            </a:r>
-            <a:r>
-              <a:rPr sz="1000" b="1" dirty="0">
-                <a:solidFill>
-                  <a:srgbClr val="2F5597"/>
-                </a:solidFill>
-                <a:latin typeface="맑은 고딕"/>
-                <a:ea typeface="맑은 고딕"/>
-              </a:rPr>
-              <a:t>] </a:t>
-            </a:r>
-            <a:r>
-              <a:rPr lang="en-US" sz="950" b="1" dirty="0">
+              <a:t>[변경 시나리오 4종, KV 캐시 관리 범위] </a:t>
+            </a:r>
+            <a:r>
+              <a:rPr sz="950" b="0" dirty="0">
                 <a:solidFill>
                   <a:srgbClr val="000000"/>
                 </a:solidFill>
                 <a:latin typeface="맑은 고딕"/>
                 <a:ea typeface="맑은 고딕"/>
               </a:rPr>
-              <a:t>S</a:t>
-            </a:r>
-            <a:r>
-              <a:rPr sz="950" b="0" dirty="0">
-                <a:solidFill>
-                  <a:srgbClr val="000000"/>
-                </a:solidFill>
-                <a:latin typeface="맑은 고딕"/>
-                <a:ea typeface="맑은 고딕"/>
-              </a:rPr>
-              <a:t>1 새 </a:t>
-            </a:r>
-            <a:r>
-              <a:rPr sz="950" b="0" dirty="0" err="1">
-                <a:solidFill>
-                  <a:srgbClr val="000000"/>
-                </a:solidFill>
-                <a:latin typeface="맑은 고딕"/>
-                <a:ea typeface="맑은 고딕"/>
-              </a:rPr>
-              <a:t>메모리</a:t>
-            </a:r>
-            <a:r>
-              <a:rPr sz="950" b="0" dirty="0">
-                <a:solidFill>
-                  <a:srgbClr val="000000"/>
-                </a:solidFill>
-                <a:latin typeface="맑은 고딕"/>
-                <a:ea typeface="맑은 고딕"/>
-              </a:rPr>
-              <a:t> tier </a:t>
-            </a:r>
-            <a:r>
-              <a:rPr sz="950" b="0" dirty="0" err="1">
-                <a:solidFill>
-                  <a:srgbClr val="000000"/>
-                </a:solidFill>
-                <a:latin typeface="맑은 고딕"/>
-                <a:ea typeface="맑은 고딕"/>
-              </a:rPr>
-              <a:t>추가</a:t>
-            </a:r>
-            <a:r>
-              <a:rPr lang="en-US" sz="950" dirty="0">
-                <a:solidFill>
-                  <a:srgbClr val="000000"/>
-                </a:solidFill>
-                <a:latin typeface="맑은 고딕"/>
-                <a:ea typeface="맑은 고딕"/>
-              </a:rPr>
-              <a:t>, </a:t>
-            </a:r>
-            <a:r>
-              <a:rPr sz="950" b="0" dirty="0">
-                <a:solidFill>
-                  <a:srgbClr val="000000"/>
-                </a:solidFill>
-                <a:latin typeface="맑은 고딕"/>
-                <a:ea typeface="맑은 고딕"/>
-              </a:rPr>
-              <a:t>S2 </a:t>
-            </a:r>
-            <a:r>
-              <a:rPr sz="950" b="0" dirty="0" err="1">
-                <a:solidFill>
-                  <a:srgbClr val="000000"/>
-                </a:solidFill>
-                <a:latin typeface="맑은 고딕"/>
-                <a:ea typeface="맑은 고딕"/>
-              </a:rPr>
-              <a:t>이동·배치·재사용</a:t>
-            </a:r>
-            <a:r>
-              <a:rPr sz="950" b="0" dirty="0">
-                <a:solidFill>
-                  <a:srgbClr val="000000"/>
-                </a:solidFill>
-                <a:latin typeface="맑은 고딕"/>
-                <a:ea typeface="맑은 고딕"/>
-              </a:rPr>
-              <a:t> </a:t>
-            </a:r>
-            <a:r>
-              <a:rPr sz="950" b="0" dirty="0" err="1">
-                <a:solidFill>
-                  <a:srgbClr val="000000"/>
-                </a:solidFill>
-                <a:latin typeface="맑은 고딕"/>
-                <a:ea typeface="맑은 고딕"/>
-              </a:rPr>
-              <a:t>정책</a:t>
-            </a:r>
-            <a:r>
-              <a:rPr sz="950" b="0" dirty="0">
-                <a:solidFill>
-                  <a:srgbClr val="000000"/>
-                </a:solidFill>
-                <a:latin typeface="맑은 고딕"/>
-                <a:ea typeface="맑은 고딕"/>
-              </a:rPr>
-              <a:t> </a:t>
-            </a:r>
-            <a:r>
-              <a:rPr sz="950" b="0" dirty="0" err="1">
-                <a:solidFill>
-                  <a:srgbClr val="000000"/>
-                </a:solidFill>
-                <a:latin typeface="맑은 고딕"/>
-                <a:ea typeface="맑은 고딕"/>
-              </a:rPr>
-              <a:t>교체</a:t>
-            </a:r>
-            <a:r>
-              <a:rPr lang="en-US" sz="950" dirty="0">
-                <a:solidFill>
-                  <a:srgbClr val="000000"/>
-                </a:solidFill>
-                <a:latin typeface="맑은 고딕"/>
-                <a:ea typeface="맑은 고딕"/>
-              </a:rPr>
-              <a:t>, </a:t>
-            </a:r>
-            <a:r>
-              <a:rPr lang="en-US" altLang="ko-KR" sz="950" dirty="0">
-                <a:solidFill>
-                  <a:srgbClr val="000000"/>
-                </a:solidFill>
-                <a:latin typeface="맑은 고딕"/>
-                <a:ea typeface="맑은 고딕"/>
-              </a:rPr>
-              <a:t>S3 </a:t>
-            </a:r>
-            <a:r>
-              <a:rPr sz="950" b="0" dirty="0" err="1">
-                <a:solidFill>
-                  <a:srgbClr val="000000"/>
-                </a:solidFill>
-                <a:latin typeface="맑은 고딕"/>
-                <a:ea typeface="맑은 고딕"/>
-              </a:rPr>
-              <a:t>vLLM</a:t>
-            </a:r>
-            <a:r>
-              <a:rPr sz="950" b="0" dirty="0">
-                <a:solidFill>
-                  <a:srgbClr val="000000"/>
-                </a:solidFill>
-                <a:latin typeface="맑은 고딕"/>
-                <a:ea typeface="맑은 고딕"/>
-              </a:rPr>
-              <a:t> upstream </a:t>
-            </a:r>
-            <a:r>
-              <a:rPr sz="950" b="0" dirty="0" err="1">
-                <a:solidFill>
-                  <a:srgbClr val="000000"/>
-                </a:solidFill>
-                <a:latin typeface="맑은 고딕"/>
-                <a:ea typeface="맑은 고딕"/>
-              </a:rPr>
-              <a:t>갱신</a:t>
-            </a:r>
-            <a:r>
-              <a:rPr sz="950" b="0" dirty="0">
-                <a:solidFill>
-                  <a:srgbClr val="000000"/>
-                </a:solidFill>
-                <a:latin typeface="맑은 고딕"/>
-                <a:ea typeface="맑은 고딕"/>
-              </a:rPr>
-              <a:t> </a:t>
-            </a:r>
-            <a:r>
-              <a:rPr sz="950" b="0" dirty="0" err="1">
-                <a:solidFill>
-                  <a:srgbClr val="000000"/>
-                </a:solidFill>
-                <a:latin typeface="맑은 고딕"/>
-                <a:ea typeface="맑은 고딕"/>
-              </a:rPr>
-              <a:t>대응</a:t>
-            </a:r>
-            <a:r>
-              <a:rPr sz="950" b="0" dirty="0">
-                <a:solidFill>
-                  <a:srgbClr val="000000"/>
-                </a:solidFill>
-                <a:latin typeface="맑은 고딕"/>
-                <a:ea typeface="맑은 고딕"/>
-              </a:rPr>
-              <a:t>(block pool, </a:t>
-            </a:r>
-            <a:r>
-              <a:rPr sz="950" b="0" dirty="0" err="1">
-                <a:solidFill>
-                  <a:srgbClr val="000000"/>
-                </a:solidFill>
-                <a:latin typeface="맑은 고딕"/>
-                <a:ea typeface="맑은 고딕"/>
-              </a:rPr>
-              <a:t>kv_offload</a:t>
-            </a:r>
-            <a:r>
-              <a:rPr sz="950" b="0" dirty="0">
-                <a:solidFill>
-                  <a:srgbClr val="000000"/>
-                </a:solidFill>
-                <a:latin typeface="맑은 고딕"/>
-                <a:ea typeface="맑은 고딕"/>
-              </a:rPr>
-              <a:t>, CUDA graph, async scheduling </a:t>
-            </a:r>
-            <a:r>
-              <a:rPr sz="950" b="0" dirty="0" err="1">
-                <a:solidFill>
-                  <a:srgbClr val="000000"/>
-                </a:solidFill>
-                <a:latin typeface="맑은 고딕"/>
-                <a:ea typeface="맑은 고딕"/>
-              </a:rPr>
-              <a:t>접점</a:t>
-            </a:r>
-            <a:r>
-              <a:rPr sz="950" b="0" dirty="0">
-                <a:solidFill>
-                  <a:srgbClr val="000000"/>
-                </a:solidFill>
-                <a:latin typeface="맑은 고딕"/>
-                <a:ea typeface="맑은 고딕"/>
-              </a:rPr>
-              <a:t> </a:t>
-            </a:r>
-            <a:r>
-              <a:rPr sz="950" b="0" dirty="0" err="1">
-                <a:solidFill>
-                  <a:srgbClr val="000000"/>
-                </a:solidFill>
-                <a:latin typeface="맑은 고딕"/>
-                <a:ea typeface="맑은 고딕"/>
-              </a:rPr>
-              <a:t>수정</a:t>
-            </a:r>
-            <a:r>
-              <a:rPr sz="950" b="0" dirty="0">
-                <a:solidFill>
-                  <a:srgbClr val="000000"/>
-                </a:solidFill>
-                <a:latin typeface="맑은 고딕"/>
-                <a:ea typeface="맑은 고딕"/>
-              </a:rPr>
-              <a:t>). </a:t>
+              <a:t>S1 새 tier·data class, S2 정책 교체, S3 vLLM upstream 갱신(block pool, kv_offload, CUDA graph, async scheduling), S4 새 event·신호. </a:t>
             </a:r>
             <a:endParaRPr lang="en-US" sz="950" b="0" dirty="0">
               <a:solidFill>
@@ -13860,7 +13510,7 @@
                 <a:latin typeface="맑은 고딕"/>
                 <a:ea typeface="맑은 고딕"/>
               </a:rPr>
-              <a:t>세 변경은 각각 단독 발생하므로 시나리오별로 판정하고 3종 중 최악값(최대 module 수)에 별 기준을 적용한다(평균 안 씀). module = 설계 component 단위(한 줄이라도 바꾸면 1개).</a:t>
+              <a:t>네 변경은 각각 단독 발생하므로 시나리오별로 판정, 4종 중 최악값(최대 module 수)에 별 기준 적용(평균 안 씀). module = 설계 component 단위(한 줄이라도 바꾸면 1개).</a:t>
             </a:r>
           </a:p>
         </p:txBody>

--- a/doc-mk/Requirements/QA1-revised.pptx
+++ b/doc-mk/Requirements/QA1-revised.pptx
@@ -11,6 +11,7 @@
     <p:sldId id="943" r:id="rId2"/>
     <p:sldId id="719" r:id="rId3"/>
     <p:sldId id="722" r:id="rId4"/>
+    <p:sldId id="944" r:id="rId10"/>
   </p:sldIdLst>
   <p:sldSz cx="12192000" cy="6858000"/>
   <p:notesSz cx="6858000" cy="9144000"/>
@@ -18508,6 +18509,1886 @@
         <p14:creationId xmlns:p14="http://schemas.microsoft.com/office/powerpoint/2010/main" val="1122340138"/>
       </p:ext>
     </p:extLst>
+  </p:cSld>
+  <p:clrMapOvr>
+    <a:masterClrMapping/>
+  </p:clrMapOvr>
+</p:sld>
+</file>
+
+<file path=ppt/slides/slide4.xml><?xml version="1.0" encoding="utf-8"?>
+<p:sld xmlns:a="http://schemas.openxmlformats.org/drawingml/2006/main" xmlns:p="http://schemas.openxmlformats.org/presentationml/2006/main" xmlns:r="http://schemas.openxmlformats.org/officeDocument/2006/relationships">
+  <p:cSld>
+    <p:spTree>
+      <p:nvGrpSpPr>
+        <p:cNvPr id="1" name=""/>
+        <p:cNvGrpSpPr/>
+        <p:nvPr/>
+      </p:nvGrpSpPr>
+      <p:grpSpPr/>
+      <p:sp>
+        <p:nvSpPr>
+          <p:cNvPr id="2" name="title"/>
+          <p:cNvSpPr txBox="1"/>
+          <p:nvPr/>
+        </p:nvSpPr>
+        <p:spPr>
+          <a:xfrm>
+            <a:off x="365760" y="223557"/>
+            <a:ext cx="11430000" cy="412421"/>
+          </a:xfrm>
+          <a:prstGeom prst="rect">
+            <a:avLst/>
+          </a:prstGeom>
+          <a:noFill/>
+        </p:spPr>
+        <p:txBody>
+          <a:bodyPr wrap="square" lIns="73152" tIns="36576" rIns="73152" bIns="36576" anchor="ctr">
+            <a:spAutoFit/>
+          </a:bodyPr>
+          <a:lstStyle/>
+          <a:p>
+            <a:pPr algn="l">
+              <a:spcAft>
+                <a:spcPts val="250"/>
+              </a:spcAft>
+            </a:pPr>
+            <a:r>
+              <a:rPr sz="2200" b="1" dirty="0" err="1">
+                <a:solidFill>
+                  <a:srgbClr val="2F5597"/>
+                </a:solidFill>
+                <a:latin typeface="맑은 고딕"/>
+                <a:ea typeface="맑은 고딕"/>
+              </a:rPr>
+              <a:t>변경 용이성 - 토큰 비용 (보조 지표)</a:t>
+            </a:r>
+            <a:endParaRPr sz="2200" b="1" dirty="0">
+              <a:solidFill>
+                <a:srgbClr val="2F5597"/>
+              </a:solidFill>
+              <a:latin typeface="맑은 고딕"/>
+              <a:ea typeface="맑은 고딕"/>
+            </a:endParaRPr>
+          </a:p>
+        </p:txBody>
+      </p:sp>
+      <p:sp>
+        <p:nvSpPr>
+          <p:cNvPr id="174" name="subtitle">
+            <a:extLst>
+              <a:ext uri="{FF2B5EF4-FFF2-40B4-BE49-F238E27FC236}">
+                <a16:creationId xmlns:a16="http://schemas.microsoft.com/office/drawing/2014/main" id="{96FE6872-F9E7-4752-A040-5DCE3EE8BACF}"/>
+              </a:ext>
+            </a:extLst>
+          </p:cNvPr>
+          <p:cNvSpPr txBox="1"/>
+          <p:nvPr/>
+        </p:nvSpPr>
+        <p:spPr>
+          <a:xfrm>
+            <a:off x="365760" y="676656"/>
+            <a:ext cx="9613127" cy="243143"/>
+          </a:xfrm>
+          <a:prstGeom prst="rect">
+            <a:avLst/>
+          </a:prstGeom>
+          <a:noFill/>
+        </p:spPr>
+        <p:txBody>
+          <a:bodyPr wrap="square" lIns="73152" tIns="36576" rIns="73152" bIns="36576" anchor="t">
+            <a:spAutoFit/>
+          </a:bodyPr>
+          <a:lstStyle/>
+          <a:p>
+            <a:pPr algn="l">
+              <a:spcAft>
+                <a:spcPts val="250"/>
+              </a:spcAft>
+            </a:pPr>
+            <a:r>
+              <a:rPr sz="1100" b="0" dirty="0" err="1">
+                <a:solidFill>
+                  <a:srgbClr val="404040"/>
+                </a:solidFill>
+                <a:latin typeface="맑은 고딕"/>
+                <a:ea typeface="맑은 고딕"/>
+              </a:rPr>
+              <a:t>주 지표는 변경 module 수. 에이전트 토큰 비용은 병기하는 보조 지표이며, 비용만으로 변경 용이성을 판정하기에는 무리가 있다 (Backup)</a:t>
+            </a:r>
+            <a:endParaRPr sz="1100" b="0" dirty="0">
+              <a:solidFill>
+                <a:srgbClr val="404040"/>
+              </a:solidFill>
+              <a:latin typeface="맑은 고딕"/>
+              <a:ea typeface="맑은 고딕"/>
+            </a:endParaRPr>
+          </a:p>
+        </p:txBody>
+      </p:sp>
+      <p:sp>
+        <p:nvSpPr>
+          <p:cNvPr id="175" name="rule">
+            <a:extLst>
+              <a:ext uri="{FF2B5EF4-FFF2-40B4-BE49-F238E27FC236}">
+                <a16:creationId xmlns:a16="http://schemas.microsoft.com/office/drawing/2014/main" id="{8B004F8A-F37F-442E-8003-EC3499BB95E3}"/>
+              </a:ext>
+            </a:extLst>
+          </p:cNvPr>
+          <p:cNvSpPr/>
+          <p:nvPr/>
+        </p:nvSpPr>
+        <p:spPr>
+          <a:xfrm>
+            <a:off x="365760" y="1005840"/>
+            <a:ext cx="11457432" cy="27432"/>
+          </a:xfrm>
+          <a:prstGeom prst="rect">
+            <a:avLst/>
+          </a:prstGeom>
+          <a:solidFill>
+            <a:srgbClr val="2F5597"/>
+          </a:solidFill>
+          <a:ln>
+            <a:noFill/>
+          </a:ln>
+          <a:effectLst/>
+        </p:spPr>
+        <p:style>
+          <a:lnRef idx="1">
+            <a:schemeClr val="accent1"/>
+          </a:lnRef>
+          <a:fillRef idx="3">
+            <a:schemeClr val="accent1"/>
+          </a:fillRef>
+          <a:effectRef idx="2">
+            <a:schemeClr val="accent1"/>
+          </a:effectRef>
+          <a:fontRef idx="minor">
+            <a:schemeClr val="lt1"/>
+          </a:fontRef>
+        </p:style>
+        <p:txBody>
+          <a:bodyPr rtlCol="0" anchor="ctr"/>
+          <a:lstStyle/>
+          <a:p>
+            <a:pPr algn="ctr"/>
+            <a:endParaRPr/>
+          </a:p>
+        </p:txBody>
+      </p:sp>
+      <p:sp>
+        <p:nvSpPr>
+          <p:cNvPr id="176" name="src">
+            <a:extLst>
+              <a:ext uri="{FF2B5EF4-FFF2-40B4-BE49-F238E27FC236}">
+                <a16:creationId xmlns:a16="http://schemas.microsoft.com/office/drawing/2014/main" id="{3981A347-39E6-4B8E-9D4A-0604100B9CAA}"/>
+              </a:ext>
+            </a:extLst>
+          </p:cNvPr>
+          <p:cNvSpPr txBox="1"/>
+          <p:nvPr/>
+        </p:nvSpPr>
+        <p:spPr>
+          <a:xfrm>
+            <a:off x="365760" y="6420000"/>
+            <a:ext cx="11430000" cy="189283"/>
+          </a:xfrm>
+          <a:prstGeom prst="rect">
+            <a:avLst/>
+          </a:prstGeom>
+          <a:noFill/>
+        </p:spPr>
+        <p:txBody>
+          <a:bodyPr wrap="square" lIns="73152" tIns="36576" rIns="73152" bIns="36576" anchor="t">
+            <a:spAutoFit/>
+          </a:bodyPr>
+          <a:lstStyle/>
+          <a:p>
+            <a:pPr algn="l">
+              <a:spcAft>
+                <a:spcPts val="0"/>
+              </a:spcAft>
+            </a:pPr>
+            <a:r>
+              <a:rPr sz="750" b="0" dirty="0" err="1">
+                <a:solidFill>
+                  <a:srgbClr val="404040"/>
+                </a:solidFill>
+                <a:latin typeface="맑은 고딕"/>
+                <a:ea typeface="맑은 고딕"/>
+              </a:rPr>
+              <a:t>출처: DP1·DP2·DP6 QA4 사전 등록 및 측정(qa4_modifiability.json, 시나리오 4 × 후보 2 × DP 3 = 24건, Evidence [B+C]). Claude Code 비용 문서(code.claude.com/docs/en/costs): 평균 약 $13/개발자·활동일, 사용자 90%가 $30/일 미만. 구간 경계($3/$10)는 DP1 사전 등록의 가정값.</a:t>
+            </a:r>
+            <a:endParaRPr sz="750" b="0" dirty="0">
+              <a:solidFill>
+                <a:srgbClr val="404040"/>
+              </a:solidFill>
+              <a:latin typeface="맑은 고딕"/>
+              <a:ea typeface="맑은 고딕"/>
+            </a:endParaRPr>
+          </a:p>
+        </p:txBody>
+      </p:sp>
+      <p:sp>
+        <p:nvSpPr>
+          <p:cNvPr id="177" name="TextBox 176"/>
+          <p:cNvSpPr txBox="1"/>
+          <p:nvPr/>
+        </p:nvSpPr>
+        <p:spPr>
+          <a:xfrm>
+            <a:off x="365760" y="1075000"/>
+            <a:ext cx="7000000" cy="230000"/>
+          </a:xfrm>
+          <a:prstGeom prst="rect">
+            <a:avLst/>
+          </a:prstGeom>
+          <a:noFill/>
+        </p:spPr>
+        <p:txBody>
+          <a:bodyPr wrap="square" lIns="73152" rIns="73152" tIns="36576" bIns="36576">
+            <a:spAutoFit/>
+          </a:bodyPr>
+          <a:lstStyle/>
+          <a:p>
+            <a:r>
+              <a:rPr sz="1000" b="1">
+                <a:solidFill>
+                  <a:srgbClr val="2F5597"/>
+                </a:solidFill>
+                <a:latin typeface="맑은 고딕"/>
+                <a:ea typeface="맑은 고딕"/>
+              </a:rPr>
+              <a:t>① 보조 지표 평가 기준: 변경 1건당 코드 에이전트 비용 (frontier tier, 시나리오별 최악값)</a:t>
+            </a:r>
+          </a:p>
+        </p:txBody>
+      </p:sp>
+      <p:graphicFrame>
+        <p:nvGraphicFramePr>
+          <p:cNvPr id="178" name="Table 177"/>
+          <p:cNvGraphicFramePr>
+            <a:graphicFrameLocks noGrp="1"/>
+          </p:cNvGraphicFramePr>
+          <p:nvPr/>
+        </p:nvGraphicFramePr>
+        <p:xfrm>
+          <a:off x="365760" y="1320000"/>
+          <a:ext cx="6500000" cy="1227744"/>
+        </p:xfrm>
+        <a:graphic>
+          <a:graphicData uri="http://schemas.openxmlformats.org/drawingml/2006/table">
+            <a:tbl>
+              <a:tblPr>
+                <a:tableStyleId>{2D5ABB26-0587-4C30-8999-92F81FD0307C}</a:tableStyleId>
+              </a:tblPr>
+              <a:tblGrid>
+                <a:gridCol w="900000"/>
+                <a:gridCol w="1250000"/>
+                <a:gridCol w="4350000"/>
+              </a:tblGrid>
+              <a:tr h="237744">
+                <a:tc>
+                  <a:txBody>
+                    <a:bodyPr wrap="square"/>
+                    <a:lstStyle/>
+                    <a:p>
+                      <a:pPr algn="ctr"/>
+                      <a:r>
+                        <a:rPr sz="900" b="1">
+                          <a:solidFill>
+                            <a:srgbClr val="FFFFFF"/>
+                          </a:solidFill>
+                          <a:latin typeface="맑은 고딕"/>
+                          <a:ea typeface="맑은 고딕"/>
+                        </a:rPr>
+                        <a:t>구간</a:t>
+                      </a:r>
+                    </a:p>
+                  </a:txBody>
+                  <a:tcPr marL="54864" marR="54864" marT="22860" marB="22860" anchor="ctr">
+                    <a:lnL w="6350">
+                      <a:solidFill>
+                        <a:srgbClr val="BFBFBF"/>
+                      </a:solidFill>
+                    </a:lnL>
+                    <a:lnR w="6350">
+                      <a:solidFill>
+                        <a:srgbClr val="BFBFBF"/>
+                      </a:solidFill>
+                    </a:lnR>
+                    <a:lnT w="6350">
+                      <a:solidFill>
+                        <a:srgbClr val="BFBFBF"/>
+                      </a:solidFill>
+                    </a:lnT>
+                    <a:lnB w="6350">
+                      <a:solidFill>
+                        <a:srgbClr val="BFBFBF"/>
+                      </a:solidFill>
+                    </a:lnB>
+                    <a:solidFill>
+                      <a:srgbClr val="2F5597"/>
+                    </a:solidFill>
+                  </a:tcPr>
+                </a:tc>
+                <a:tc>
+                  <a:txBody>
+                    <a:bodyPr wrap="square"/>
+                    <a:lstStyle/>
+                    <a:p>
+                      <a:pPr algn="ctr"/>
+                      <a:r>
+                        <a:rPr sz="900" b="1">
+                          <a:solidFill>
+                            <a:srgbClr val="FFFFFF"/>
+                          </a:solidFill>
+                          <a:latin typeface="맑은 고딕"/>
+                          <a:ea typeface="맑은 고딕"/>
+                        </a:rPr>
+                        <a:t>변경 1건 비용 (USD)</a:t>
+                      </a:r>
+                    </a:p>
+                  </a:txBody>
+                  <a:tcPr marL="54864" marR="54864" marT="22860" marB="22860" anchor="ctr">
+                    <a:lnL w="6350">
+                      <a:solidFill>
+                        <a:srgbClr val="BFBFBF"/>
+                      </a:solidFill>
+                    </a:lnL>
+                    <a:lnR w="6350">
+                      <a:solidFill>
+                        <a:srgbClr val="BFBFBF"/>
+                      </a:solidFill>
+                    </a:lnR>
+                    <a:lnT w="6350">
+                      <a:solidFill>
+                        <a:srgbClr val="BFBFBF"/>
+                      </a:solidFill>
+                    </a:lnT>
+                    <a:lnB w="6350">
+                      <a:solidFill>
+                        <a:srgbClr val="BFBFBF"/>
+                      </a:solidFill>
+                    </a:lnB>
+                    <a:solidFill>
+                      <a:srgbClr val="2F5597"/>
+                    </a:solidFill>
+                  </a:tcPr>
+                </a:tc>
+                <a:tc>
+                  <a:txBody>
+                    <a:bodyPr wrap="square"/>
+                    <a:lstStyle/>
+                    <a:p>
+                      <a:pPr algn="ctr"/>
+                      <a:r>
+                        <a:rPr sz="900" b="1">
+                          <a:solidFill>
+                            <a:srgbClr val="FFFFFF"/>
+                          </a:solidFill>
+                          <a:latin typeface="맑은 고딕"/>
+                          <a:ea typeface="맑은 고딕"/>
+                        </a:rPr>
+                        <a:t>의미 · 근거</a:t>
+                      </a:r>
+                    </a:p>
+                  </a:txBody>
+                  <a:tcPr marL="54864" marR="54864" marT="22860" marB="22860" anchor="ctr">
+                    <a:lnL w="6350">
+                      <a:solidFill>
+                        <a:srgbClr val="BFBFBF"/>
+                      </a:solidFill>
+                    </a:lnL>
+                    <a:lnR w="6350">
+                      <a:solidFill>
+                        <a:srgbClr val="BFBFBF"/>
+                      </a:solidFill>
+                    </a:lnR>
+                    <a:lnT w="6350">
+                      <a:solidFill>
+                        <a:srgbClr val="BFBFBF"/>
+                      </a:solidFill>
+                    </a:lnT>
+                    <a:lnB w="6350">
+                      <a:solidFill>
+                        <a:srgbClr val="BFBFBF"/>
+                      </a:solidFill>
+                    </a:lnB>
+                    <a:solidFill>
+                      <a:srgbClr val="2F5597"/>
+                    </a:solidFill>
+                  </a:tcPr>
+                </a:tc>
+              </a:tr>
+              <a:tr h="330000">
+                <a:tc>
+                  <a:txBody>
+                    <a:bodyPr wrap="square"/>
+                    <a:lstStyle/>
+                    <a:p>
+                      <a:pPr algn="l"/>
+                      <a:r>
+                        <a:rPr sz="850" b="1">
+                          <a:solidFill>
+                            <a:srgbClr val="000000"/>
+                          </a:solidFill>
+                          <a:latin typeface="맑은 고딕"/>
+                          <a:ea typeface="맑은 고딕"/>
+                        </a:rPr>
+                        <a:t>양호</a:t>
+                      </a:r>
+                    </a:p>
+                  </a:txBody>
+                  <a:tcPr marL="54864" marR="54864" marT="22860" marB="22860" anchor="ctr">
+                    <a:lnL w="6350">
+                      <a:solidFill>
+                        <a:srgbClr val="BFBFBF"/>
+                      </a:solidFill>
+                    </a:lnL>
+                    <a:lnR w="6350">
+                      <a:solidFill>
+                        <a:srgbClr val="BFBFBF"/>
+                      </a:solidFill>
+                    </a:lnR>
+                    <a:lnT w="6350">
+                      <a:solidFill>
+                        <a:srgbClr val="BFBFBF"/>
+                      </a:solidFill>
+                    </a:lnT>
+                    <a:lnB w="6350">
+                      <a:solidFill>
+                        <a:srgbClr val="BFBFBF"/>
+                      </a:solidFill>
+                    </a:lnB>
+                    <a:solidFill>
+                      <a:srgbClr val="E2EFDA"/>
+                    </a:solidFill>
+                  </a:tcPr>
+                </a:tc>
+                <a:tc>
+                  <a:txBody>
+                    <a:bodyPr wrap="square"/>
+                    <a:lstStyle/>
+                    <a:p>
+                      <a:pPr algn="ctr"/>
+                      <a:r>
+                        <a:rPr sz="850" b="0">
+                          <a:solidFill>
+                            <a:srgbClr val="000000"/>
+                          </a:solidFill>
+                          <a:latin typeface="맑은 고딕"/>
+                          <a:ea typeface="맑은 고딕"/>
+                        </a:rPr>
+                        <a:t>≤ $3</a:t>
+                      </a:r>
+                    </a:p>
+                  </a:txBody>
+                  <a:tcPr marL="54864" marR="54864" marT="22860" marB="22860" anchor="ctr">
+                    <a:lnL w="6350">
+                      <a:solidFill>
+                        <a:srgbClr val="BFBFBF"/>
+                      </a:solidFill>
+                    </a:lnL>
+                    <a:lnR w="6350">
+                      <a:solidFill>
+                        <a:srgbClr val="BFBFBF"/>
+                      </a:solidFill>
+                    </a:lnR>
+                    <a:lnT w="6350">
+                      <a:solidFill>
+                        <a:srgbClr val="BFBFBF"/>
+                      </a:solidFill>
+                    </a:lnT>
+                    <a:lnB w="6350">
+                      <a:solidFill>
+                        <a:srgbClr val="BFBFBF"/>
+                      </a:solidFill>
+                    </a:lnB>
+                    <a:solidFill>
+                      <a:srgbClr val="E2EFDA"/>
+                    </a:solidFill>
+                  </a:tcPr>
+                </a:tc>
+                <a:tc>
+                  <a:txBody>
+                    <a:bodyPr wrap="square"/>
+                    <a:lstStyle/>
+                    <a:p>
+                      <a:pPr algn="l"/>
+                      <a:r>
+                        <a:rPr sz="850" b="0">
+                          <a:solidFill>
+                            <a:srgbClr val="000000"/>
+                          </a:solidFill>
+                          <a:latin typeface="맑은 고딕"/>
+                          <a:ea typeface="맑은 고딕"/>
+                        </a:rPr>
+                        <a:t>통상 PR 1건 규모의 에이전트 세션(1시간 내외). 일 평균 비용(약 $13/개발자·일)의 1/4 이하</a:t>
+                      </a:r>
+                    </a:p>
+                  </a:txBody>
+                  <a:tcPr marL="54864" marR="54864" marT="22860" marB="22860" anchor="ctr">
+                    <a:lnL w="6350">
+                      <a:solidFill>
+                        <a:srgbClr val="BFBFBF"/>
+                      </a:solidFill>
+                    </a:lnL>
+                    <a:lnR w="6350">
+                      <a:solidFill>
+                        <a:srgbClr val="BFBFBF"/>
+                      </a:solidFill>
+                    </a:lnR>
+                    <a:lnT w="6350">
+                      <a:solidFill>
+                        <a:srgbClr val="BFBFBF"/>
+                      </a:solidFill>
+                    </a:lnT>
+                    <a:lnB w="6350">
+                      <a:solidFill>
+                        <a:srgbClr val="BFBFBF"/>
+                      </a:solidFill>
+                    </a:lnB>
+                    <a:solidFill>
+                      <a:srgbClr val="E2EFDA"/>
+                    </a:solidFill>
+                  </a:tcPr>
+                </a:tc>
+              </a:tr>
+              <a:tr h="330000">
+                <a:tc>
+                  <a:txBody>
+                    <a:bodyPr wrap="square"/>
+                    <a:lstStyle/>
+                    <a:p>
+                      <a:pPr algn="l"/>
+                      <a:r>
+                        <a:rPr sz="850" b="1">
+                          <a:solidFill>
+                            <a:srgbClr val="000000"/>
+                          </a:solidFill>
+                          <a:latin typeface="맑은 고딕"/>
+                          <a:ea typeface="맑은 고딕"/>
+                        </a:rPr>
+                        <a:t>주의</a:t>
+                      </a:r>
+                    </a:p>
+                  </a:txBody>
+                  <a:tcPr marL="54864" marR="54864" marT="22860" marB="22860" anchor="ctr">
+                    <a:lnL w="6350">
+                      <a:solidFill>
+                        <a:srgbClr val="BFBFBF"/>
+                      </a:solidFill>
+                    </a:lnL>
+                    <a:lnR w="6350">
+                      <a:solidFill>
+                        <a:srgbClr val="BFBFBF"/>
+                      </a:solidFill>
+                    </a:lnR>
+                    <a:lnT w="6350">
+                      <a:solidFill>
+                        <a:srgbClr val="BFBFBF"/>
+                      </a:solidFill>
+                    </a:lnT>
+                    <a:lnB w="6350">
+                      <a:solidFill>
+                        <a:srgbClr val="BFBFBF"/>
+                      </a:solidFill>
+                    </a:lnB>
+                    <a:solidFill>
+                      <a:srgbClr val="FFF2CC"/>
+                    </a:solidFill>
+                  </a:tcPr>
+                </a:tc>
+                <a:tc>
+                  <a:txBody>
+                    <a:bodyPr wrap="square"/>
+                    <a:lstStyle/>
+                    <a:p>
+                      <a:pPr algn="ctr"/>
+                      <a:r>
+                        <a:rPr sz="850" b="0">
+                          <a:solidFill>
+                            <a:srgbClr val="000000"/>
+                          </a:solidFill>
+                          <a:latin typeface="맑은 고딕"/>
+                          <a:ea typeface="맑은 고딕"/>
+                        </a:rPr>
+                        <a:t>≤ $10</a:t>
+                      </a:r>
+                    </a:p>
+                  </a:txBody>
+                  <a:tcPr marL="54864" marR="54864" marT="22860" marB="22860" anchor="ctr">
+                    <a:lnL w="6350">
+                      <a:solidFill>
+                        <a:srgbClr val="BFBFBF"/>
+                      </a:solidFill>
+                    </a:lnL>
+                    <a:lnR w="6350">
+                      <a:solidFill>
+                        <a:srgbClr val="BFBFBF"/>
+                      </a:solidFill>
+                    </a:lnR>
+                    <a:lnT w="6350">
+                      <a:solidFill>
+                        <a:srgbClr val="BFBFBF"/>
+                      </a:solidFill>
+                    </a:lnT>
+                    <a:lnB w="6350">
+                      <a:solidFill>
+                        <a:srgbClr val="BFBFBF"/>
+                      </a:solidFill>
+                    </a:lnB>
+                    <a:solidFill>
+                      <a:srgbClr val="FFF2CC"/>
+                    </a:solidFill>
+                  </a:tcPr>
+                </a:tc>
+                <a:tc>
+                  <a:txBody>
+                    <a:bodyPr wrap="square"/>
+                    <a:lstStyle/>
+                    <a:p>
+                      <a:pPr algn="l"/>
+                      <a:r>
+                        <a:rPr sz="850" b="0">
+                          <a:solidFill>
+                            <a:srgbClr val="000000"/>
+                          </a:solidFill>
+                          <a:latin typeface="맑은 고딕"/>
+                          <a:ea typeface="맑은 고딕"/>
+                        </a:rPr>
+                        <a:t>장시간·반복 세션. 일 평균($13) 안에서 하루 작업으로 흡수</a:t>
+                      </a:r>
+                    </a:p>
+                  </a:txBody>
+                  <a:tcPr marL="54864" marR="54864" marT="22860" marB="22860" anchor="ctr">
+                    <a:lnL w="6350">
+                      <a:solidFill>
+                        <a:srgbClr val="BFBFBF"/>
+                      </a:solidFill>
+                    </a:lnL>
+                    <a:lnR w="6350">
+                      <a:solidFill>
+                        <a:srgbClr val="BFBFBF"/>
+                      </a:solidFill>
+                    </a:lnR>
+                    <a:lnT w="6350">
+                      <a:solidFill>
+                        <a:srgbClr val="BFBFBF"/>
+                      </a:solidFill>
+                    </a:lnT>
+                    <a:lnB w="6350">
+                      <a:solidFill>
+                        <a:srgbClr val="BFBFBF"/>
+                      </a:solidFill>
+                    </a:lnB>
+                    <a:solidFill>
+                      <a:srgbClr val="FFF2CC"/>
+                    </a:solidFill>
+                  </a:tcPr>
+                </a:tc>
+              </a:tr>
+              <a:tr h="330000">
+                <a:tc>
+                  <a:txBody>
+                    <a:bodyPr wrap="square"/>
+                    <a:lstStyle/>
+                    <a:p>
+                      <a:pPr algn="l"/>
+                      <a:r>
+                        <a:rPr sz="850" b="1">
+                          <a:solidFill>
+                            <a:srgbClr val="000000"/>
+                          </a:solidFill>
+                          <a:latin typeface="맑은 고딕"/>
+                          <a:ea typeface="맑은 고딕"/>
+                        </a:rPr>
+                        <a:t>예산 검토</a:t>
+                      </a:r>
+                    </a:p>
+                  </a:txBody>
+                  <a:tcPr marL="54864" marR="54864" marT="22860" marB="22860" anchor="ctr">
+                    <a:lnL w="6350">
+                      <a:solidFill>
+                        <a:srgbClr val="BFBFBF"/>
+                      </a:solidFill>
+                    </a:lnL>
+                    <a:lnR w="6350">
+                      <a:solidFill>
+                        <a:srgbClr val="BFBFBF"/>
+                      </a:solidFill>
+                    </a:lnR>
+                    <a:lnT w="6350">
+                      <a:solidFill>
+                        <a:srgbClr val="BFBFBF"/>
+                      </a:solidFill>
+                    </a:lnT>
+                    <a:lnB w="6350">
+                      <a:solidFill>
+                        <a:srgbClr val="BFBFBF"/>
+                      </a:solidFill>
+                    </a:lnB>
+                    <a:solidFill>
+                      <a:srgbClr val="FBE0D6"/>
+                    </a:solidFill>
+                  </a:tcPr>
+                </a:tc>
+                <a:tc>
+                  <a:txBody>
+                    <a:bodyPr wrap="square"/>
+                    <a:lstStyle/>
+                    <a:p>
+                      <a:pPr algn="ctr"/>
+                      <a:r>
+                        <a:rPr sz="850" b="0">
+                          <a:solidFill>
+                            <a:srgbClr val="000000"/>
+                          </a:solidFill>
+                          <a:latin typeface="맑은 고딕"/>
+                          <a:ea typeface="맑은 고딕"/>
+                        </a:rPr>
+                        <a:t>&gt; $10</a:t>
+                      </a:r>
+                    </a:p>
+                  </a:txBody>
+                  <a:tcPr marL="54864" marR="54864" marT="22860" marB="22860" anchor="ctr">
+                    <a:lnL w="6350">
+                      <a:solidFill>
+                        <a:srgbClr val="BFBFBF"/>
+                      </a:solidFill>
+                    </a:lnL>
+                    <a:lnR w="6350">
+                      <a:solidFill>
+                        <a:srgbClr val="BFBFBF"/>
+                      </a:solidFill>
+                    </a:lnR>
+                    <a:lnT w="6350">
+                      <a:solidFill>
+                        <a:srgbClr val="BFBFBF"/>
+                      </a:solidFill>
+                    </a:lnT>
+                    <a:lnB w="6350">
+                      <a:solidFill>
+                        <a:srgbClr val="BFBFBF"/>
+                      </a:solidFill>
+                    </a:lnB>
+                    <a:solidFill>
+                      <a:srgbClr val="FBE0D6"/>
+                    </a:solidFill>
+                  </a:tcPr>
+                </a:tc>
+                <a:tc>
+                  <a:txBody>
+                    <a:bodyPr wrap="square"/>
+                    <a:lstStyle/>
+                    <a:p>
+                      <a:pPr algn="l"/>
+                      <a:r>
+                        <a:rPr sz="850" b="0">
+                          <a:solidFill>
+                            <a:srgbClr val="000000"/>
+                          </a:solidFill>
+                          <a:latin typeface="맑은 고딕"/>
+                          <a:ea typeface="맑은 고딕"/>
+                        </a:rPr>
+                        <a:t>일 평균에 근접·초과. 변경 1건에 별도 예산 검토 필요 (상위 10% 사용자 상한 $30/일의 1/3 이상)</a:t>
+                      </a:r>
+                    </a:p>
+                  </a:txBody>
+                  <a:tcPr marL="54864" marR="54864" marT="22860" marB="22860" anchor="ctr">
+                    <a:lnL w="6350">
+                      <a:solidFill>
+                        <a:srgbClr val="BFBFBF"/>
+                      </a:solidFill>
+                    </a:lnL>
+                    <a:lnR w="6350">
+                      <a:solidFill>
+                        <a:srgbClr val="BFBFBF"/>
+                      </a:solidFill>
+                    </a:lnR>
+                    <a:lnT w="6350">
+                      <a:solidFill>
+                        <a:srgbClr val="BFBFBF"/>
+                      </a:solidFill>
+                    </a:lnT>
+                    <a:lnB w="6350">
+                      <a:solidFill>
+                        <a:srgbClr val="BFBFBF"/>
+                      </a:solidFill>
+                    </a:lnB>
+                    <a:solidFill>
+                      <a:srgbClr val="FBE0D6"/>
+                    </a:solidFill>
+                  </a:tcPr>
+                </a:tc>
+              </a:tr>
+            </a:tbl>
+          </a:graphicData>
+        </a:graphic>
+      </p:graphicFrame>
+      <p:sp>
+        <p:nvSpPr>
+          <p:cNvPr id="179" name="Rounded Rectangle 178"/>
+          <p:cNvSpPr/>
+          <p:nvPr/>
+        </p:nvSpPr>
+        <p:spPr>
+          <a:xfrm>
+            <a:off x="7050000" y="1075000"/>
+            <a:ext cx="4773192" cy="1500000"/>
+          </a:xfrm>
+          <a:prstGeom prst="roundRect">
+            <a:avLst>
+              <a:gd name="adj" fmla="val 6000"/>
+            </a:avLst>
+          </a:prstGeom>
+          <a:solidFill>
+            <a:srgbClr val="F2F6FC"/>
+          </a:solidFill>
+          <a:ln w="12700">
+            <a:solidFill>
+              <a:srgbClr val="2F5597"/>
+            </a:solidFill>
+          </a:ln>
+          <a:effectLst/>
+        </p:spPr>
+        <p:style>
+          <a:lnRef idx="1">
+            <a:schemeClr val="accent1"/>
+          </a:lnRef>
+          <a:fillRef idx="3">
+            <a:schemeClr val="accent1"/>
+          </a:fillRef>
+          <a:effectRef idx="2">
+            <a:schemeClr val="accent1"/>
+          </a:effectRef>
+          <a:fontRef idx="minor">
+            <a:schemeClr val="lt1"/>
+          </a:fontRef>
+        </p:style>
+        <p:txBody>
+          <a:bodyPr rtlCol="0" anchor="ctr" wrap="square"/>
+          <a:lstStyle/>
+          <a:p>
+            <a:pPr algn="l"/>
+            <a:r>
+              <a:rPr sz="900" b="1">
+                <a:solidFill>
+                  <a:srgbClr val="2F5597"/>
+                </a:solidFill>
+                <a:latin typeface="맑은 고딕"/>
+                <a:ea typeface="맑은 고딕"/>
+              </a:rPr>
+              <a:t>측정식 (DP 공통, 사전 등록)</a:t>
+            </a:r>
+          </a:p>
+          <a:p>
+            <a:pPr algn="l"/>
+            <a:r>
+              <a:rPr sz="900" b="1">
+                <a:solidFill>
+                  <a:srgbClr val="2F5597"/>
+                </a:solidFill>
+                <a:latin typeface="맑은 고딕"/>
+                <a:ea typeface="맑은 고딕"/>
+              </a:rPr>
+              <a:t>비용 = 토큰배율 × (C̄·p_in + N_turns·C̄·p_cache + T_out·p_out) ÷ 10⁶</a:t>
+            </a:r>
+          </a:p>
+          <a:p>
+            <a:pPr algn="l"/>
+            <a:r>
+              <a:rPr sz="900" b="0">
+                <a:solidFill>
+                  <a:srgbClr val="404040"/>
+                </a:solidFill>
+                <a:latin typeface="맑은 고딕"/>
+                <a:ea typeface="맑은 고딕"/>
+              </a:rPr>
+              <a:t>C̄ = 25k + 1.5·60·S (S: 읽는 module LOC), N_turns = 10 + 5·module 수</a:t>
+            </a:r>
+          </a:p>
+          <a:p>
+            <a:pPr algn="l"/>
+            <a:r>
+              <a:rPr sz="900" b="0">
+                <a:solidFill>
+                  <a:srgbClr val="404040"/>
+                </a:solidFill>
+                <a:latin typeface="맑은 고딕"/>
+                <a:ea typeface="맑은 고딕"/>
+              </a:rPr>
+              <a:t>T_out = 60·LOC·2 + 300·N_turns  (60 = 12 token/LOC × 실제 통합 5배)</a:t>
+            </a:r>
+          </a:p>
+          <a:p>
+            <a:pPr algn="l"/>
+            <a:r>
+              <a:rPr sz="900" b="0">
+                <a:solidFill>
+                  <a:srgbClr val="404040"/>
+                </a:solidFill>
+                <a:latin typeface="맑은 고딕"/>
+                <a:ea typeface="맑은 고딕"/>
+              </a:rPr>
+              <a:t>frontier: $15 / $1.5 / $75 per Mtok (입력/캐시/출력), 토큰배율 0.6</a:t>
+            </a:r>
+          </a:p>
+          <a:p>
+            <a:pPr algn="l"/>
+            <a:r>
+              <a:rPr sz="900" b="1">
+                <a:solidFill>
+                  <a:srgbClr val="C00000"/>
+                </a:solidFill>
+                <a:latin typeface="맑은 고딕"/>
+                <a:ea typeface="맑은 고딕"/>
+              </a:rPr>
+              <a:t>토큰·가격·턴 수 모두 가정(ASSUMED). 실제 에이전트 세션 측정이 아님</a:t>
+            </a:r>
+          </a:p>
+        </p:txBody>
+      </p:sp>
+      <p:sp>
+        <p:nvSpPr>
+          <p:cNvPr id="180" name="TextBox 179"/>
+          <p:cNvSpPr txBox="1"/>
+          <p:nvPr/>
+        </p:nvSpPr>
+        <p:spPr>
+          <a:xfrm>
+            <a:off x="365760" y="2640000"/>
+            <a:ext cx="11400000" cy="230000"/>
+          </a:xfrm>
+          <a:prstGeom prst="rect">
+            <a:avLst/>
+          </a:prstGeom>
+          <a:noFill/>
+        </p:spPr>
+        <p:txBody>
+          <a:bodyPr wrap="square" lIns="73152" rIns="73152" tIns="36576" bIns="36576">
+            <a:spAutoFit/>
+          </a:bodyPr>
+          <a:lstStyle/>
+          <a:p>
+            <a:r>
+              <a:rPr sz="1000" b="1">
+                <a:solidFill>
+                  <a:srgbClr val="2F5597"/>
+                </a:solidFill>
+                <a:latin typeface="맑은 고딕"/>
+                <a:ea typeface="맑은 고딕"/>
+              </a:rPr>
+              <a:t>② 이 지표만으로 변경 용이성을 판정하기 어려운 이유  (DP1·DP2·DP6 측정 24건 = 시나리오 4 × 후보 2 × DP 3)</a:t>
+            </a:r>
+          </a:p>
+        </p:txBody>
+      </p:sp>
+      <p:graphicFrame>
+        <p:nvGraphicFramePr>
+          <p:cNvPr id="181" name="Table 180"/>
+          <p:cNvGraphicFramePr>
+            <a:graphicFrameLocks noGrp="1"/>
+          </p:cNvGraphicFramePr>
+          <p:nvPr/>
+        </p:nvGraphicFramePr>
+        <p:xfrm>
+          <a:off x="365760" y="2880000"/>
+          <a:ext cx="11457432" cy="2587744"/>
+        </p:xfrm>
+        <a:graphic>
+          <a:graphicData uri="http://schemas.openxmlformats.org/drawingml/2006/table">
+            <a:tbl>
+              <a:tblPr>
+                <a:tableStyleId>{2D5ABB26-0587-4C30-8999-92F81FD0307C}</a:tableStyleId>
+              </a:tblPr>
+              <a:tblGrid>
+                <a:gridCol w="2000000"/>
+                <a:gridCol w="6550000"/>
+                <a:gridCol w="2907432"/>
+              </a:tblGrid>
+              <a:tr h="237744">
+                <a:tc>
+                  <a:txBody>
+                    <a:bodyPr wrap="square"/>
+                    <a:lstStyle/>
+                    <a:p>
+                      <a:pPr algn="ctr"/>
+                      <a:r>
+                        <a:rPr sz="900" b="1">
+                          <a:solidFill>
+                            <a:srgbClr val="FFFFFF"/>
+                          </a:solidFill>
+                          <a:latin typeface="맑은 고딕"/>
+                          <a:ea typeface="맑은 고딕"/>
+                        </a:rPr>
+                        <a:t>한계</a:t>
+                      </a:r>
+                    </a:p>
+                  </a:txBody>
+                  <a:tcPr marL="54864" marR="54864" marT="22860" marB="22860" anchor="ctr">
+                    <a:lnL w="6350">
+                      <a:solidFill>
+                        <a:srgbClr val="BFBFBF"/>
+                      </a:solidFill>
+                    </a:lnL>
+                    <a:lnR w="6350">
+                      <a:solidFill>
+                        <a:srgbClr val="BFBFBF"/>
+                      </a:solidFill>
+                    </a:lnR>
+                    <a:lnT w="6350">
+                      <a:solidFill>
+                        <a:srgbClr val="BFBFBF"/>
+                      </a:solidFill>
+                    </a:lnT>
+                    <a:lnB w="6350">
+                      <a:solidFill>
+                        <a:srgbClr val="BFBFBF"/>
+                      </a:solidFill>
+                    </a:lnB>
+                    <a:solidFill>
+                      <a:srgbClr val="2F5597"/>
+                    </a:solidFill>
+                  </a:tcPr>
+                </a:tc>
+                <a:tc>
+                  <a:txBody>
+                    <a:bodyPr wrap="square"/>
+                    <a:lstStyle/>
+                    <a:p>
+                      <a:pPr algn="ctr"/>
+                      <a:r>
+                        <a:rPr sz="900" b="1">
+                          <a:solidFill>
+                            <a:srgbClr val="FFFFFF"/>
+                          </a:solidFill>
+                          <a:latin typeface="맑은 고딕"/>
+                          <a:ea typeface="맑은 고딕"/>
+                        </a:rPr>
+                        <a:t>근거 (측정 24건 기준)</a:t>
+                      </a:r>
+                    </a:p>
+                  </a:txBody>
+                  <a:tcPr marL="54864" marR="54864" marT="22860" marB="22860" anchor="ctr">
+                    <a:lnL w="6350">
+                      <a:solidFill>
+                        <a:srgbClr val="BFBFBF"/>
+                      </a:solidFill>
+                    </a:lnL>
+                    <a:lnR w="6350">
+                      <a:solidFill>
+                        <a:srgbClr val="BFBFBF"/>
+                      </a:solidFill>
+                    </a:lnR>
+                    <a:lnT w="6350">
+                      <a:solidFill>
+                        <a:srgbClr val="BFBFBF"/>
+                      </a:solidFill>
+                    </a:lnT>
+                    <a:lnB w="6350">
+                      <a:solidFill>
+                        <a:srgbClr val="BFBFBF"/>
+                      </a:solidFill>
+                    </a:lnB>
+                    <a:solidFill>
+                      <a:srgbClr val="2F5597"/>
+                    </a:solidFill>
+                  </a:tcPr>
+                </a:tc>
+                <a:tc>
+                  <a:txBody>
+                    <a:bodyPr wrap="square"/>
+                    <a:lstStyle/>
+                    <a:p>
+                      <a:pPr algn="ctr"/>
+                      <a:r>
+                        <a:rPr sz="900" b="1">
+                          <a:solidFill>
+                            <a:srgbClr val="FFFFFF"/>
+                          </a:solidFill>
+                          <a:latin typeface="맑은 고딕"/>
+                          <a:ea typeface="맑은 고딕"/>
+                        </a:rPr>
+                        <a:t>이 덱의 처리</a:t>
+                      </a:r>
+                    </a:p>
+                  </a:txBody>
+                  <a:tcPr marL="54864" marR="54864" marT="22860" marB="22860" anchor="ctr">
+                    <a:lnL w="6350">
+                      <a:solidFill>
+                        <a:srgbClr val="BFBFBF"/>
+                      </a:solidFill>
+                    </a:lnL>
+                    <a:lnR w="6350">
+                      <a:solidFill>
+                        <a:srgbClr val="BFBFBF"/>
+                      </a:solidFill>
+                    </a:lnR>
+                    <a:lnT w="6350">
+                      <a:solidFill>
+                        <a:srgbClr val="BFBFBF"/>
+                      </a:solidFill>
+                    </a:lnT>
+                    <a:lnB w="6350">
+                      <a:solidFill>
+                        <a:srgbClr val="BFBFBF"/>
+                      </a:solidFill>
+                    </a:lnB>
+                    <a:solidFill>
+                      <a:srgbClr val="2F5597"/>
+                    </a:solidFill>
+                  </a:tcPr>
+                </a:tc>
+              </a:tr>
+              <a:tr h="470000">
+                <a:tc>
+                  <a:txBody>
+                    <a:bodyPr wrap="square"/>
+                    <a:lstStyle/>
+                    <a:p>
+                      <a:pPr algn="l"/>
+                      <a:r>
+                        <a:rPr sz="800" b="1">
+                          <a:solidFill>
+                            <a:srgbClr val="000000"/>
+                          </a:solidFill>
+                          <a:latin typeface="맑은 고딕"/>
+                          <a:ea typeface="맑은 고딕"/>
+                        </a:rPr>
+                        <a:t>1  추정값이며 실측이 아님</a:t>
+                      </a:r>
+                    </a:p>
+                  </a:txBody>
+                  <a:tcPr marL="54864" marR="54864" marT="22860" marB="22860" anchor="ctr">
+                    <a:lnL w="6350">
+                      <a:solidFill>
+                        <a:srgbClr val="BFBFBF"/>
+                      </a:solidFill>
+                    </a:lnL>
+                    <a:lnR w="6350">
+                      <a:solidFill>
+                        <a:srgbClr val="BFBFBF"/>
+                      </a:solidFill>
+                    </a:lnR>
+                    <a:lnT w="6350">
+                      <a:solidFill>
+                        <a:srgbClr val="BFBFBF"/>
+                      </a:solidFill>
+                    </a:lnT>
+                    <a:lnB w="6350">
+                      <a:solidFill>
+                        <a:srgbClr val="BFBFBF"/>
+                      </a:solidFill>
+                    </a:lnB>
+                    <a:solidFill>
+                      <a:srgbClr val="FFFFFF"/>
+                    </a:solidFill>
+                  </a:tcPr>
+                </a:tc>
+                <a:tc>
+                  <a:txBody>
+                    <a:bodyPr wrap="square"/>
+                    <a:lstStyle/>
+                    <a:p>
+                      <a:pPr algn="l"/>
+                      <a:r>
+                        <a:rPr sz="800" b="0">
+                          <a:solidFill>
+                            <a:srgbClr val="000000"/>
+                          </a:solidFill>
+                          <a:latin typeface="맑은 고딕"/>
+                          <a:ea typeface="맑은 고딕"/>
+                        </a:rPr>
+                        <a:t>토큰 수·가격·턴 수가 전부 가정이고 에이전트 세션을 실행해 잰 값이 아니다. 캐시 입력($1.5)과 신규 입력($15)이 10배 차이라 캐시 적중 가정만으로도 금액이 크게 달라진다. 가격은 시점 의존(2026-10-03 가정).</a:t>
+                      </a:r>
+                    </a:p>
+                  </a:txBody>
+                  <a:tcPr marL="54864" marR="54864" marT="22860" marB="22860" anchor="ctr">
+                    <a:lnL w="6350">
+                      <a:solidFill>
+                        <a:srgbClr val="BFBFBF"/>
+                      </a:solidFill>
+                    </a:lnL>
+                    <a:lnR w="6350">
+                      <a:solidFill>
+                        <a:srgbClr val="BFBFBF"/>
+                      </a:solidFill>
+                    </a:lnR>
+                    <a:lnT w="6350">
+                      <a:solidFill>
+                        <a:srgbClr val="BFBFBF"/>
+                      </a:solidFill>
+                    </a:lnT>
+                    <a:lnB w="6350">
+                      <a:solidFill>
+                        <a:srgbClr val="BFBFBF"/>
+                      </a:solidFill>
+                    </a:lnB>
+                    <a:solidFill>
+                      <a:srgbClr val="FFFFFF"/>
+                    </a:solidFill>
+                  </a:tcPr>
+                </a:tc>
+                <a:tc>
+                  <a:txBody>
+                    <a:bodyPr wrap="square"/>
+                    <a:lstStyle/>
+                    <a:p>
+                      <a:pPr algn="l"/>
+                      <a:r>
+                        <a:rPr sz="800" b="0">
+                          <a:solidFill>
+                            <a:srgbClr val="000000"/>
+                          </a:solidFill>
+                          <a:latin typeface="맑은 고딕"/>
+                          <a:ea typeface="맑은 고딕"/>
+                        </a:rPr>
+                        <a:t>절대 금액이 아니라 같은 모델 안의 상대 비교로만 사용</a:t>
+                      </a:r>
+                    </a:p>
+                  </a:txBody>
+                  <a:tcPr marL="54864" marR="54864" marT="22860" marB="22860" anchor="ctr">
+                    <a:lnL w="6350">
+                      <a:solidFill>
+                        <a:srgbClr val="BFBFBF"/>
+                      </a:solidFill>
+                    </a:lnL>
+                    <a:lnR w="6350">
+                      <a:solidFill>
+                        <a:srgbClr val="BFBFBF"/>
+                      </a:solidFill>
+                    </a:lnR>
+                    <a:lnT w="6350">
+                      <a:solidFill>
+                        <a:srgbClr val="BFBFBF"/>
+                      </a:solidFill>
+                    </a:lnT>
+                    <a:lnB w="6350">
+                      <a:solidFill>
+                        <a:srgbClr val="BFBFBF"/>
+                      </a:solidFill>
+                    </a:lnB>
+                    <a:solidFill>
+                      <a:srgbClr val="FFFFFF"/>
+                    </a:solidFill>
+                  </a:tcPr>
+                </a:tc>
+              </a:tr>
+              <a:tr h="470000">
+                <a:tc>
+                  <a:txBody>
+                    <a:bodyPr wrap="square"/>
+                    <a:lstStyle/>
+                    <a:p>
+                      <a:pPr algn="l"/>
+                      <a:r>
+                        <a:rPr sz="800" b="1">
+                          <a:solidFill>
+                            <a:srgbClr val="000000"/>
+                          </a:solidFill>
+                          <a:latin typeface="맑은 고딕"/>
+                          <a:ea typeface="맑은 고딕"/>
+                        </a:rPr>
+                        <a:t>2  module 수와 거의 같은 정보</a:t>
+                      </a:r>
+                    </a:p>
+                  </a:txBody>
+                  <a:tcPr marL="54864" marR="54864" marT="22860" marB="22860" anchor="ctr">
+                    <a:lnL w="6350">
+                      <a:solidFill>
+                        <a:srgbClr val="BFBFBF"/>
+                      </a:solidFill>
+                    </a:lnL>
+                    <a:lnR w="6350">
+                      <a:solidFill>
+                        <a:srgbClr val="BFBFBF"/>
+                      </a:solidFill>
+                    </a:lnR>
+                    <a:lnT w="6350">
+                      <a:solidFill>
+                        <a:srgbClr val="BFBFBF"/>
+                      </a:solidFill>
+                    </a:lnT>
+                    <a:lnB w="6350">
+                      <a:solidFill>
+                        <a:srgbClr val="BFBFBF"/>
+                      </a:solidFill>
+                    </a:lnB>
+                    <a:solidFill>
+                      <a:srgbClr val="F7F9FC"/>
+                    </a:solidFill>
+                  </a:tcPr>
+                </a:tc>
+                <a:tc>
+                  <a:txBody>
+                    <a:bodyPr wrap="square"/>
+                    <a:lstStyle/>
+                    <a:p>
+                      <a:pPr algn="l"/>
+                      <a:r>
+                        <a:rPr sz="800" b="0">
+                          <a:solidFill>
+                            <a:srgbClr val="000000"/>
+                          </a:solidFill>
+                          <a:latin typeface="맑은 고딕"/>
+                          <a:ea typeface="맑은 고딕"/>
+                        </a:rPr>
+                        <a:t>24건에서 비용과 module 수의 Spearman 0.89(R² 0.84), 변경 LOC와는 0.44. 공식이 module 수에 비례하는 턴 수와 읽는 코드 크기를 포함하므로 상관의 일부는 구성상 필연이다. 실측 세션에서 독립 정보를 주는지는 미검증.</a:t>
+                      </a:r>
+                    </a:p>
+                  </a:txBody>
+                  <a:tcPr marL="54864" marR="54864" marT="22860" marB="22860" anchor="ctr">
+                    <a:lnL w="6350">
+                      <a:solidFill>
+                        <a:srgbClr val="BFBFBF"/>
+                      </a:solidFill>
+                    </a:lnL>
+                    <a:lnR w="6350">
+                      <a:solidFill>
+                        <a:srgbClr val="BFBFBF"/>
+                      </a:solidFill>
+                    </a:lnR>
+                    <a:lnT w="6350">
+                      <a:solidFill>
+                        <a:srgbClr val="BFBFBF"/>
+                      </a:solidFill>
+                    </a:lnT>
+                    <a:lnB w="6350">
+                      <a:solidFill>
+                        <a:srgbClr val="BFBFBF"/>
+                      </a:solidFill>
+                    </a:lnB>
+                    <a:solidFill>
+                      <a:srgbClr val="F7F9FC"/>
+                    </a:solidFill>
+                  </a:tcPr>
+                </a:tc>
+                <a:tc>
+                  <a:txBody>
+                    <a:bodyPr wrap="square"/>
+                    <a:lstStyle/>
+                    <a:p>
+                      <a:pPr algn="l"/>
+                      <a:r>
+                        <a:rPr sz="800" b="0">
+                          <a:solidFill>
+                            <a:srgbClr val="000000"/>
+                          </a:solidFill>
+                          <a:latin typeface="맑은 고딕"/>
+                          <a:ea typeface="맑은 고딕"/>
+                        </a:rPr>
+                        <a:t>별점은 module 수(주 지표)로 정하고 비용은 병기. 합산하면 이중 반영</a:t>
+                      </a:r>
+                    </a:p>
+                  </a:txBody>
+                  <a:tcPr marL="54864" marR="54864" marT="22860" marB="22860" anchor="ctr">
+                    <a:lnL w="6350">
+                      <a:solidFill>
+                        <a:srgbClr val="BFBFBF"/>
+                      </a:solidFill>
+                    </a:lnL>
+                    <a:lnR w="6350">
+                      <a:solidFill>
+                        <a:srgbClr val="BFBFBF"/>
+                      </a:solidFill>
+                    </a:lnR>
+                    <a:lnT w="6350">
+                      <a:solidFill>
+                        <a:srgbClr val="BFBFBF"/>
+                      </a:solidFill>
+                    </a:lnT>
+                    <a:lnB w="6350">
+                      <a:solidFill>
+                        <a:srgbClr val="BFBFBF"/>
+                      </a:solidFill>
+                    </a:lnB>
+                    <a:solidFill>
+                      <a:srgbClr val="F7F9FC"/>
+                    </a:solidFill>
+                  </a:tcPr>
+                </a:tc>
+              </a:tr>
+              <a:tr h="470000">
+                <a:tc>
+                  <a:txBody>
+                    <a:bodyPr wrap="square"/>
+                    <a:lstStyle/>
+                    <a:p>
+                      <a:pPr algn="l"/>
+                      <a:r>
+                        <a:rPr sz="800" b="1">
+                          <a:solidFill>
+                            <a:srgbClr val="000000"/>
+                          </a:solidFill>
+                          <a:latin typeface="맑은 고딕"/>
+                          <a:ea typeface="맑은 고딕"/>
+                        </a:rPr>
+                        <a:t>3  분해능이 낮음</a:t>
+                      </a:r>
+                    </a:p>
+                  </a:txBody>
+                  <a:tcPr marL="54864" marR="54864" marT="22860" marB="22860" anchor="ctr">
+                    <a:lnL w="6350">
+                      <a:solidFill>
+                        <a:srgbClr val="BFBFBF"/>
+                      </a:solidFill>
+                    </a:lnL>
+                    <a:lnR w="6350">
+                      <a:solidFill>
+                        <a:srgbClr val="BFBFBF"/>
+                      </a:solidFill>
+                    </a:lnR>
+                    <a:lnT w="6350">
+                      <a:solidFill>
+                        <a:srgbClr val="BFBFBF"/>
+                      </a:solidFill>
+                    </a:lnT>
+                    <a:lnB w="6350">
+                      <a:solidFill>
+                        <a:srgbClr val="BFBFBF"/>
+                      </a:solidFill>
+                    </a:lnB>
+                    <a:solidFill>
+                      <a:srgbClr val="FFFFFF"/>
+                    </a:solidFill>
+                  </a:tcPr>
+                </a:tc>
+                <a:tc>
+                  <a:txBody>
+                    <a:bodyPr wrap="square"/>
+                    <a:lstStyle/>
+                    <a:p>
+                      <a:pPr algn="l"/>
+                      <a:r>
+                        <a:rPr sz="800" b="0">
+                          <a:solidFill>
+                            <a:srgbClr val="000000"/>
+                          </a:solidFill>
+                          <a:latin typeface="맑은 고딕"/>
+                          <a:ea typeface="맑은 고딕"/>
+                        </a:rPr>
+                        <a:t>24건 전부 $0.83~$2.08로 $3 경계 안이고 최대/최소는 2.5배다. 상수를 비관으로 두면 2건(DP1 S4 C2 $3.06, DP6 S4 C2 $3.38)만 경계를 넘어, 구간이 상수 선택에 좌우된다.</a:t>
+                      </a:r>
+                    </a:p>
+                  </a:txBody>
+                  <a:tcPr marL="54864" marR="54864" marT="22860" marB="22860" anchor="ctr">
+                    <a:lnL w="6350">
+                      <a:solidFill>
+                        <a:srgbClr val="BFBFBF"/>
+                      </a:solidFill>
+                    </a:lnL>
+                    <a:lnR w="6350">
+                      <a:solidFill>
+                        <a:srgbClr val="BFBFBF"/>
+                      </a:solidFill>
+                    </a:lnR>
+                    <a:lnT w="6350">
+                      <a:solidFill>
+                        <a:srgbClr val="BFBFBF"/>
+                      </a:solidFill>
+                    </a:lnT>
+                    <a:lnB w="6350">
+                      <a:solidFill>
+                        <a:srgbClr val="BFBFBF"/>
+                      </a:solidFill>
+                    </a:lnB>
+                    <a:solidFill>
+                      <a:srgbClr val="FFFFFF"/>
+                    </a:solidFill>
+                  </a:tcPr>
+                </a:tc>
+                <a:tc>
+                  <a:txBody>
+                    <a:bodyPr wrap="square"/>
+                    <a:lstStyle/>
+                    <a:p>
+                      <a:pPr algn="l"/>
+                      <a:r>
+                        <a:rPr sz="800" b="0">
+                          <a:solidFill>
+                            <a:srgbClr val="000000"/>
+                          </a:solidFill>
+                          <a:latin typeface="맑은 고딕"/>
+                          <a:ea typeface="맑은 고딕"/>
+                        </a:rPr>
+                        <a:t>상수 낙관/비관 민감도를 함께 보고</a:t>
+                      </a:r>
+                    </a:p>
+                  </a:txBody>
+                  <a:tcPr marL="54864" marR="54864" marT="22860" marB="22860" anchor="ctr">
+                    <a:lnL w="6350">
+                      <a:solidFill>
+                        <a:srgbClr val="BFBFBF"/>
+                      </a:solidFill>
+                    </a:lnL>
+                    <a:lnR w="6350">
+                      <a:solidFill>
+                        <a:srgbClr val="BFBFBF"/>
+                      </a:solidFill>
+                    </a:lnR>
+                    <a:lnT w="6350">
+                      <a:solidFill>
+                        <a:srgbClr val="BFBFBF"/>
+                      </a:solidFill>
+                    </a:lnT>
+                    <a:lnB w="6350">
+                      <a:solidFill>
+                        <a:srgbClr val="BFBFBF"/>
+                      </a:solidFill>
+                    </a:lnB>
+                    <a:solidFill>
+                      <a:srgbClr val="FFFFFF"/>
+                    </a:solidFill>
+                  </a:tcPr>
+                </a:tc>
+              </a:tr>
+              <a:tr h="470000">
+                <a:tc>
+                  <a:txBody>
+                    <a:bodyPr wrap="square"/>
+                    <a:lstStyle/>
+                    <a:p>
+                      <a:pPr algn="l"/>
+                      <a:r>
+                        <a:rPr sz="800" b="1">
+                          <a:solidFill>
+                            <a:srgbClr val="000000"/>
+                          </a:solidFill>
+                          <a:latin typeface="맑은 고딕"/>
+                          <a:ea typeface="맑은 고딕"/>
+                        </a:rPr>
+                        <a:t>4  모델 tier에 따라 결론이 갈림</a:t>
+                      </a:r>
+                    </a:p>
+                  </a:txBody>
+                  <a:tcPr marL="54864" marR="54864" marT="22860" marB="22860" anchor="ctr">
+                    <a:lnL w="6350">
+                      <a:solidFill>
+                        <a:srgbClr val="BFBFBF"/>
+                      </a:solidFill>
+                    </a:lnL>
+                    <a:lnR w="6350">
+                      <a:solidFill>
+                        <a:srgbClr val="BFBFBF"/>
+                      </a:solidFill>
+                    </a:lnR>
+                    <a:lnT w="6350">
+                      <a:solidFill>
+                        <a:srgbClr val="BFBFBF"/>
+                      </a:solidFill>
+                    </a:lnT>
+                    <a:lnB w="6350">
+                      <a:solidFill>
+                        <a:srgbClr val="BFBFBF"/>
+                      </a:solidFill>
+                    </a:lnB>
+                    <a:solidFill>
+                      <a:srgbClr val="F7F9FC"/>
+                    </a:solidFill>
+                  </a:tcPr>
+                </a:tc>
+                <a:tc>
+                  <a:txBody>
+                    <a:bodyPr wrap="square"/>
+                    <a:lstStyle/>
+                    <a:p>
+                      <a:pPr algn="l"/>
+                      <a:r>
+                        <a:rPr sz="800" b="0">
+                          <a:solidFill>
+                            <a:srgbClr val="000000"/>
+                          </a:solidFill>
+                          <a:latin typeface="맑은 고딕"/>
+                          <a:ea typeface="맑은 고딕"/>
+                        </a:rPr>
+                        <a:t>24건 모두 frontier는 토큰이 적고(0.6배 가정) 금액은 mid보다 크다. "토큰이 적다"와 "금액이 적다"가 반대로 나오므로 토큰 수는 비교 지표가 못 된다.</a:t>
+                      </a:r>
+                    </a:p>
+                  </a:txBody>
+                  <a:tcPr marL="54864" marR="54864" marT="22860" marB="22860" anchor="ctr">
+                    <a:lnL w="6350">
+                      <a:solidFill>
+                        <a:srgbClr val="BFBFBF"/>
+                      </a:solidFill>
+                    </a:lnL>
+                    <a:lnR w="6350">
+                      <a:solidFill>
+                        <a:srgbClr val="BFBFBF"/>
+                      </a:solidFill>
+                    </a:lnR>
+                    <a:lnT w="6350">
+                      <a:solidFill>
+                        <a:srgbClr val="BFBFBF"/>
+                      </a:solidFill>
+                    </a:lnT>
+                    <a:lnB w="6350">
+                      <a:solidFill>
+                        <a:srgbClr val="BFBFBF"/>
+                      </a:solidFill>
+                    </a:lnB>
+                    <a:solidFill>
+                      <a:srgbClr val="F7F9FC"/>
+                    </a:solidFill>
+                  </a:tcPr>
+                </a:tc>
+                <a:tc>
+                  <a:txBody>
+                    <a:bodyPr wrap="square"/>
+                    <a:lstStyle/>
+                    <a:p>
+                      <a:pPr algn="l"/>
+                      <a:r>
+                        <a:rPr sz="800" b="0">
+                          <a:solidFill>
+                            <a:srgbClr val="000000"/>
+                          </a:solidFill>
+                          <a:latin typeface="맑은 고딕"/>
+                          <a:ea typeface="맑은 고딕"/>
+                        </a:rPr>
+                        <a:t>토큰 수가 아닌 금액으로, tier를 명시(frontier 기준)</a:t>
+                      </a:r>
+                    </a:p>
+                  </a:txBody>
+                  <a:tcPr marL="54864" marR="54864" marT="22860" marB="22860" anchor="ctr">
+                    <a:lnL w="6350">
+                      <a:solidFill>
+                        <a:srgbClr val="BFBFBF"/>
+                      </a:solidFill>
+                    </a:lnL>
+                    <a:lnR w="6350">
+                      <a:solidFill>
+                        <a:srgbClr val="BFBFBF"/>
+                      </a:solidFill>
+                    </a:lnR>
+                    <a:lnT w="6350">
+                      <a:solidFill>
+                        <a:srgbClr val="BFBFBF"/>
+                      </a:solidFill>
+                    </a:lnT>
+                    <a:lnB w="6350">
+                      <a:solidFill>
+                        <a:srgbClr val="BFBFBF"/>
+                      </a:solidFill>
+                    </a:lnB>
+                    <a:solidFill>
+                      <a:srgbClr val="F7F9FC"/>
+                    </a:solidFill>
+                  </a:tcPr>
+                </a:tc>
+              </a:tr>
+              <a:tr h="470000">
+                <a:tc>
+                  <a:txBody>
+                    <a:bodyPr wrap="square"/>
+                    <a:lstStyle/>
+                    <a:p>
+                      <a:pPr algn="l"/>
+                      <a:r>
+                        <a:rPr sz="800" b="1">
+                          <a:solidFill>
+                            <a:srgbClr val="000000"/>
+                          </a:solidFill>
+                          <a:latin typeface="맑은 고딕"/>
+                          <a:ea typeface="맑은 고딕"/>
+                        </a:rPr>
+                        <a:t>5  사람의 리뷰·검증 비용이 빠짐</a:t>
+                      </a:r>
+                    </a:p>
+                  </a:txBody>
+                  <a:tcPr marL="54864" marR="54864" marT="22860" marB="22860" anchor="ctr">
+                    <a:lnL w="6350">
+                      <a:solidFill>
+                        <a:srgbClr val="BFBFBF"/>
+                      </a:solidFill>
+                    </a:lnL>
+                    <a:lnR w="6350">
+                      <a:solidFill>
+                        <a:srgbClr val="BFBFBF"/>
+                      </a:solidFill>
+                    </a:lnR>
+                    <a:lnT w="6350">
+                      <a:solidFill>
+                        <a:srgbClr val="BFBFBF"/>
+                      </a:solidFill>
+                    </a:lnT>
+                    <a:lnB w="6350">
+                      <a:solidFill>
+                        <a:srgbClr val="BFBFBF"/>
+                      </a:solidFill>
+                    </a:lnB>
+                    <a:solidFill>
+                      <a:srgbClr val="FFFFFF"/>
+                    </a:solidFill>
+                  </a:tcPr>
+                </a:tc>
+                <a:tc>
+                  <a:txBody>
+                    <a:bodyPr wrap="square"/>
+                    <a:lstStyle/>
+                    <a:p>
+                      <a:pPr algn="l"/>
+                      <a:r>
+                        <a:rPr sz="800" b="0">
+                          <a:solidFill>
+                            <a:srgbClr val="000000"/>
+                          </a:solidFill>
+                          <a:latin typeface="맑은 고딕"/>
+                          <a:ea typeface="맑은 고딕"/>
+                        </a:rPr>
+                        <a:t>에이전트가 만든 diff를 사람이 리뷰하고 통합 테스트·회귀를 확인하는 시간은 토큰에 잡히지 않는다. 이 시간은 변경이 닿는 module·interface가 많을수록 늘지만 공식은 작성 LOC와 읽는 크기만 본다. interface 의미를 바꾸는 소량 변경은 낮은 비용으로 나온다.</a:t>
+                      </a:r>
+                    </a:p>
+                  </a:txBody>
+                  <a:tcPr marL="54864" marR="54864" marT="22860" marB="22860" anchor="ctr">
+                    <a:lnL w="6350">
+                      <a:solidFill>
+                        <a:srgbClr val="BFBFBF"/>
+                      </a:solidFill>
+                    </a:lnL>
+                    <a:lnR w="6350">
+                      <a:solidFill>
+                        <a:srgbClr val="BFBFBF"/>
+                      </a:solidFill>
+                    </a:lnR>
+                    <a:lnT w="6350">
+                      <a:solidFill>
+                        <a:srgbClr val="BFBFBF"/>
+                      </a:solidFill>
+                    </a:lnT>
+                    <a:lnB w="6350">
+                      <a:solidFill>
+                        <a:srgbClr val="BFBFBF"/>
+                      </a:solidFill>
+                    </a:lnB>
+                    <a:solidFill>
+                      <a:srgbClr val="FFFFFF"/>
+                    </a:solidFill>
+                  </a:tcPr>
+                </a:tc>
+                <a:tc>
+                  <a:txBody>
+                    <a:bodyPr wrap="square"/>
+                    <a:lstStyle/>
+                    <a:p>
+                      <a:pPr algn="l"/>
+                      <a:r>
+                        <a:rPr sz="800" b="0">
+                          <a:solidFill>
+                            <a:srgbClr val="000000"/>
+                          </a:solidFill>
+                          <a:latin typeface="맑은 고딕"/>
+                          <a:ea typeface="맑은 고딕"/>
+                        </a:rPr>
+                        <a:t>공수(MM)에 test·review overhead ×2.0 반영. major interface 변경은 module 수와 무관하게 미충족</a:t>
+                      </a:r>
+                    </a:p>
+                  </a:txBody>
+                  <a:tcPr marL="54864" marR="54864" marT="22860" marB="22860" anchor="ctr">
+                    <a:lnL w="6350">
+                      <a:solidFill>
+                        <a:srgbClr val="BFBFBF"/>
+                      </a:solidFill>
+                    </a:lnL>
+                    <a:lnR w="6350">
+                      <a:solidFill>
+                        <a:srgbClr val="BFBFBF"/>
+                      </a:solidFill>
+                    </a:lnR>
+                    <a:lnT w="6350">
+                      <a:solidFill>
+                        <a:srgbClr val="BFBFBF"/>
+                      </a:solidFill>
+                    </a:lnT>
+                    <a:lnB w="6350">
+                      <a:solidFill>
+                        <a:srgbClr val="BFBFBF"/>
+                      </a:solidFill>
+                    </a:lnB>
+                    <a:solidFill>
+                      <a:srgbClr val="FFFFFF"/>
+                    </a:solidFill>
+                  </a:tcPr>
+                </a:tc>
+              </a:tr>
+            </a:tbl>
+          </a:graphicData>
+        </a:graphic>
+      </p:graphicFrame>
+      <p:sp>
+        <p:nvSpPr>
+          <p:cNvPr id="182" name="Rounded Rectangle 181"/>
+          <p:cNvSpPr/>
+          <p:nvPr/>
+        </p:nvSpPr>
+        <p:spPr>
+          <a:xfrm>
+            <a:off x="365760" y="5690000"/>
+            <a:ext cx="11457432" cy="640000"/>
+          </a:xfrm>
+          <a:prstGeom prst="roundRect">
+            <a:avLst>
+              <a:gd name="adj" fmla="val 12000"/>
+            </a:avLst>
+          </a:prstGeom>
+          <a:solidFill>
+            <a:srgbClr val="FFF2CC"/>
+          </a:solidFill>
+          <a:ln w="12700">
+            <a:solidFill>
+              <a:srgbClr val="BF9000"/>
+            </a:solidFill>
+          </a:ln>
+          <a:effectLst/>
+        </p:spPr>
+        <p:style>
+          <a:lnRef idx="1">
+            <a:schemeClr val="accent1"/>
+          </a:lnRef>
+          <a:fillRef idx="3">
+            <a:schemeClr val="accent1"/>
+          </a:fillRef>
+          <a:effectRef idx="2">
+            <a:schemeClr val="accent1"/>
+          </a:effectRef>
+          <a:fontRef idx="minor">
+            <a:schemeClr val="lt1"/>
+          </a:fontRef>
+        </p:style>
+        <p:txBody>
+          <a:bodyPr rtlCol="0" anchor="ctr" wrap="square" lIns="110000" rIns="110000"/>
+          <a:lstStyle/>
+          <a:p>
+            <a:pPr algn="l"/>
+            <a:r>
+              <a:rPr sz="950" b="1">
+                <a:solidFill>
+                  <a:srgbClr val="404040"/>
+                </a:solidFill>
+                <a:latin typeface="맑은 고딕"/>
+                <a:ea typeface="맑은 고딕"/>
+              </a:rPr>
+              <a:t>결론: 토큰 비용은 "에이전트가 구현에 쓰는 직접 비용"을 보여 주는 참고값이다.</a:t>
+            </a:r>
+          </a:p>
+          <a:p>
+            <a:pPr algn="l"/>
+            <a:r>
+              <a:rPr sz="950" b="0">
+                <a:solidFill>
+                  <a:srgbClr val="404040"/>
+                </a:solidFill>
+                <a:latin typeface="맑은 고딕"/>
+                <a:ea typeface="맑은 고딕"/>
+              </a:rPr>
+              <a:t>변경 용이성은 변경 module 수(주 지표)와 개발 공수(MM)로 판정하고, 토큰 비용은 병기와 민감도 확인용 보조 지표로만 둔다. 별점에 합산하지 않는다.</a:t>
+            </a:r>
+          </a:p>
+        </p:txBody>
+      </p:sp>
+    </p:spTree>
   </p:cSld>
   <p:clrMapOvr>
     <a:masterClrMapping/>
